--- a/10-Knowledge-Products/KP1-GEA/videos/module_5/en/decks/KP1_M5_5.3_Deck_v0.2.pptx
+++ b/10-Knowledge-Products/KP1-GEA/videos/module_5/en/decks/KP1_M5_5.3_Deck_v0.2.pptx
@@ -14,14 +14,14 @@
     <p:handoutMasterId r:id="rId47"/>
   </p:handoutMasterIdLst>
   <p:sldIdLst>
-    <p:sldId id="2681" r:id="rId8"/>
-    <p:sldId id="2709" r:id="rId31"/>
-    <p:sldId id="2710" r:id="rId32"/>
     <p:sldId id="2711" r:id="rId33"/>
     <p:sldId id="2712" r:id="rId34"/>
     <p:sldId id="2713" r:id="rId35"/>
     <p:sldId id="2714" r:id="rId36"/>
     <p:sldId id="2715" r:id="rId37"/>
+    <p:sldId id="2716" r:id="rId38"/>
+    <p:sldId id="2717" r:id="rId39"/>
+    <p:sldId id="2718" r:id="rId40"/>
   </p:sldIdLst>
   <p:sldSz cx="12192000" cy="6858000"/>
   <p:notesSz cx="6858000" cy="9144000"/>
@@ -933,153 +933,13 @@
           <a:lstStyle/>
           <a:p>
             <a:r>
-              <a:t>Sources slide, held ~5 seconds at the end of the video. Links are compiled into the YouTube description per ITU convention; no URLs read aloud.</a:t>
-            </a:r>
-          </a:p>
-        </p:txBody>
-      </p:sp>
-      <p:sp>
-        <p:nvSpPr>
-          <p:cNvPr id="4" name="Slide Number Placeholder 3"/>
-          <p:cNvSpPr>
-            <a:spLocks noGrp="1"/>
-          </p:cNvSpPr>
-          <p:nvPr>
-            <p:ph type="sldNum" idx="5" sz="quarter"/>
-          </p:nvPr>
-        </p:nvSpPr>
-        <p:spPr/>
-      </p:sp>
-    </p:spTree>
-  </p:cSld>
-  <p:clrMapOvr>
-    <a:masterClrMapping/>
-  </p:clrMapOvr>
-</p:notes>
-</file>
-
-<file path=ppt/notesSlides/notesSlide16.xml><?xml version="1.0" encoding="utf-8"?>
-<p:notes xmlns:a="http://schemas.openxmlformats.org/drawingml/2006/main" xmlns:p="http://schemas.openxmlformats.org/presentationml/2006/main" xmlns:r="http://schemas.openxmlformats.org/officeDocument/2006/relationships">
-  <p:cSld>
-    <p:spTree>
-      <p:nvGrpSpPr>
-        <p:cNvPr id="1" name=""/>
-        <p:cNvGrpSpPr/>
-        <p:nvPr/>
-      </p:nvGrpSpPr>
-      <p:grpSpPr>
-        <a:xfrm>
-          <a:off x="0" y="0"/>
-          <a:ext cx="0" cy="0"/>
-          <a:chOff x="0" y="0"/>
-          <a:chExt cx="0" cy="0"/>
-        </a:xfrm>
-      </p:grpSpPr>
-      <p:sp>
-        <p:nvSpPr>
-          <p:cNvPr id="2" name="Slide Image Placeholder 1"/>
-          <p:cNvSpPr>
-            <a:spLocks noGrp="1"/>
-          </p:cNvSpPr>
-          <p:nvPr>
-            <p:ph type="sldImg" idx="2"/>
-          </p:nvPr>
-        </p:nvSpPr>
-        <p:spPr/>
-      </p:sp>
-      <p:sp>
-        <p:nvSpPr>
-          <p:cNvPr id="3" name="Notes Placeholder 2"/>
-          <p:cNvSpPr>
-            <a:spLocks noGrp="1"/>
-          </p:cNvSpPr>
-          <p:nvPr>
-            <p:ph type="body" idx="3" sz="quarter"/>
-          </p:nvPr>
-        </p:nvSpPr>
-        <p:spPr/>
-        <p:txBody>
-          <a:bodyPr/>
-          <a:lstStyle/>
-          <a:p>
-            <a:r>
-              <a:t>VO, slide 1: Suppose you want this beyond one sector. Two questions follow: does the method travel, and how do you roll it out without trying to do everything at once? The answers are linked — and the second sector is cheaper than the first.</a:t>
-            </a:r>
-          </a:p>
-        </p:txBody>
-      </p:sp>
-      <p:sp>
-        <p:nvSpPr>
-          <p:cNvPr id="4" name="Slide Number Placeholder 3"/>
-          <p:cNvSpPr>
-            <a:spLocks noGrp="1"/>
-          </p:cNvSpPr>
-          <p:nvPr>
-            <p:ph type="sldNum" idx="5" sz="quarter"/>
-          </p:nvPr>
-        </p:nvSpPr>
-        <p:spPr/>
-      </p:sp>
-    </p:spTree>
-  </p:cSld>
-  <p:clrMapOvr>
-    <a:masterClrMapping/>
-  </p:clrMapOvr>
-</p:notes>
-</file>
-
-<file path=ppt/notesSlides/notesSlide17.xml><?xml version="1.0" encoding="utf-8"?>
-<p:notes xmlns:a="http://schemas.openxmlformats.org/drawingml/2006/main" xmlns:p="http://schemas.openxmlformats.org/presentationml/2006/main" xmlns:r="http://schemas.openxmlformats.org/officeDocument/2006/relationships">
-  <p:cSld>
-    <p:spTree>
-      <p:nvGrpSpPr>
-        <p:cNvPr id="1" name=""/>
-        <p:cNvGrpSpPr/>
-        <p:nvPr/>
-      </p:nvGrpSpPr>
-      <p:grpSpPr>
-        <a:xfrm>
-          <a:off x="0" y="0"/>
-          <a:ext cx="0" cy="0"/>
-          <a:chOff x="0" y="0"/>
-          <a:chExt cx="0" cy="0"/>
-        </a:xfrm>
-      </p:grpSpPr>
-      <p:sp>
-        <p:nvSpPr>
-          <p:cNvPr id="2" name="Slide Image Placeholder 1"/>
-          <p:cNvSpPr>
-            <a:spLocks noGrp="1"/>
-          </p:cNvSpPr>
-          <p:nvPr>
-            <p:ph type="sldImg" idx="2"/>
-          </p:nvPr>
-        </p:nvSpPr>
-        <p:spPr/>
-      </p:sp>
-      <p:sp>
-        <p:nvSpPr>
-          <p:cNvPr id="3" name="Notes Placeholder 2"/>
-          <p:cNvSpPr>
-            <a:spLocks noGrp="1"/>
-          </p:cNvSpPr>
-          <p:nvPr>
-            <p:ph type="body" idx="3" sz="quarter"/>
-          </p:nvPr>
-        </p:nvSpPr>
-        <p:spPr/>
-        <p:txBody>
-          <a:bodyPr/>
-          <a:lstStyle/>
-          <a:p>
-            <a:r>
-              <a:t>VO: Most of the method does not change. The five phases, the four sign-offs, the six deliverables, the reuse-before-build default, the binding governance board — none of that is specific to one sector. What changes is only the record at the centre of the fragmentation. In education it is the learner. In health it is the patient. In agriculture the farmer; in social protection the beneficiary. Different domain, identical shape — registered several times, re-entered on paper, blocking a flagship the minister has promised. The problem rhymes across sectors because the cause is the same: no shared plan. Which means you are not buying a one-sector tool. You are building a national capability, of which the first sector is the foundation and the proof.</a:t>
+              <a:t>VO: From wave two, each new sector consumes what wave one built. The health sector uses the identity platform and the data-exchange backbone that already exist. Its run of the method is lighter, because the team, the framework and the governance are in place. It delivers faster and costs less, and every sector that joins makes the next one easier still. That is why the expensive part is building the muscle once. But it only compounds if you govern it. The same board that reviews projects inside a sector governs the national pipeline: which sector comes next, what each must reuse, where an exception is genuinely warranted. A rollout that is launched and left drifts back into fragmentation, one sector at a time.</a:t>
             </a:r>
           </a:p>
           <a:p/>
           <a:p>
             <a:r>
-              <a:t>On screen: health, agriculture and social protection are named as sectors the method transfers to — this is the ToR §4.4 portability statement, not a set of worked examples.</a:t>
+              <a:t>Production cue: the pivotal slide of this video — the compounding and the governance on one page. Hold it a beat longer. On screen: a wave roadmap — each wave a smaller block than the last, the platform bar beneath growing, the Board bar across the top. Reveal the waves left to right; the Board bar is already there.</a:t>
             </a:r>
           </a:p>
         </p:txBody>
@@ -1149,13 +1009,7 @@
           <a:lstStyle/>
           <a:p>
             <a:r>
-              <a:t>VO: So roll it out in waves. Wave one is one sector, done well. Pick the sector with a clear flagship the minister cares about — the single learner record, the single patient record — and run the full method there, end to end. But notice what wave one really builds: not just that sector's architecture, but the national foundations. The permanent team. The governance board. The first shared platforms, identity and data exchange. Wave one looks like one sector. It is actually the foundation the whole rollout stands on.</a:t>
-            </a:r>
-          </a:p>
-          <a:p/>
-          <a:p>
-            <a:r>
-              <a:t>On screen: the sector block standing on a wider foundation block — reveal the base on 'but notice what wave one really builds'.</a:t>
+              <a:t>Title card — the cold open. The hosts name the module, the video number, the title and the single message on this slide; no scripted narration. Hold until the opener begins; the opener is narrated on the next slide.</a:t>
             </a:r>
           </a:p>
         </p:txBody>
@@ -1225,13 +1079,7 @@
           <a:lstStyle/>
           <a:p>
             <a:r>
-              <a:t>VO: From wave two, each new sector consumes what wave one built. The health sector uses the identity platform and the data-exchange backbone that already exist. Its run of the method is lighter, because the team, the framework and the governance are in place. It delivers faster and costs less, and every sector that joins makes the next one easier still. That is why the expensive part is building the muscle once. But it only compounds if you govern it. The same board that reviews projects inside a sector governs the national pipeline: which sector comes next, what each must reuse, where an exception is genuinely warranted. A rollout that is launched and left drifts back into fragmentation, one sector at a time.</a:t>
-            </a:r>
-          </a:p>
-          <a:p/>
-          <a:p>
-            <a:r>
-              <a:t>Production cue: the pivotal slide of this video — the compounding and the governance on one page. Hold it a beat longer. On screen: a wave roadmap — each wave a smaller block than the last, the platform bar beneath growing, the Board bar across the top. Reveal the waves left to right; the Board bar is already there.</a:t>
+              <a:t>VO: Suppose you want this beyond one sector. Two questions follow: does the method travel, and how do you roll it out without trying to do everything at once? The answers are linked — and the second sector is cheaper than the first.</a:t>
             </a:r>
           </a:p>
         </p:txBody>
@@ -1301,13 +1149,13 @@
           <a:lstStyle/>
           <a:p>
             <a:r>
-              <a:t>PRACTICE BOX (on-screen only — never read it, never paraphrase it, never point at it). It replaces the narrated handoff: this video ends on the recap and the Sources slide.</a:t>
+              <a:t>VO: So roll it out in waves. Wave one is one sector, done well. Pick the sector with a clear flagship the minister cares about — the single learner record, the single patient record — and run the full method there, end to end. But notice what wave one really builds: not just that sector's architecture, but the national foundations. The permanent team. The governance board. The first shared platforms, identity and data exchange. Wave one looks like one sector. It is actually the foundation the whole rollout stands on.</a:t>
             </a:r>
           </a:p>
           <a:p/>
           <a:p>
             <a:r>
-              <a:t>VO: So the method travels, and the rollout is a wave roadmap: one sector to build the foundations, then sectors one at a time, each cheaper than the last, governed into a single national architecture.</a:t>
+              <a:t>On screen: the sector block standing on a wider foundation block — reveal the base on 'but notice what wave one really builds'.</a:t>
             </a:r>
           </a:p>
         </p:txBody>
@@ -1377,7 +1225,13 @@
           <a:lstStyle/>
           <a:p>
             <a:r>
-              <a:t>VO: Then report the national picture upward, on one page, every quarter. How many sectors are live. The re-use rate across them. Which shared platforms are in place. This shows the minister a national capability actually growing — which is what sustains funding across a change of government — and it lets you see early if a sector is drifting from the shared foundation, while correction is still cheap.</a:t>
+              <a:t>VO: Most of the method does not change. The five phases, the four sign-offs, the six deliverables, the reuse-before-build default, the binding governance board — none of that is specific to one sector. What changes is only the record at the centre of the fragmentation. In education it is the learner. In health it is the patient. In agriculture the farmer; in social protection the beneficiary. Different domain, identical shape — registered several times, re-entered on paper, blocking a flagship the minister has promised. The problem rhymes across sectors because the cause is the same: no shared plan. Which means you are not buying a one-sector tool. You are building a national capability, of which the first sector is the foundation and the proof.</a:t>
+            </a:r>
+          </a:p>
+          <a:p/>
+          <a:p>
+            <a:r>
+              <a:t>On screen: health, agriculture and social protection are named as sectors the method transfers to — this is the ToR §4.4 portability statement, not a set of worked examples.</a:t>
             </a:r>
           </a:p>
         </p:txBody>
@@ -1402,7 +1256,7 @@
 </p:notes>
 </file>
 
-<file path=ppt/notesSlides/notesSlide21.xml><?xml version="1.0" encoding="utf-8"?>
+<file path=ppt/notesSlides/notesSlide23.xml><?xml version="1.0" encoding="utf-8"?>
 <p:notes xmlns:a="http://schemas.openxmlformats.org/drawingml/2006/main" xmlns:p="http://schemas.openxmlformats.org/presentationml/2006/main" xmlns:r="http://schemas.openxmlformats.org/officeDocument/2006/relationships">
   <p:cSld>
     <p:spTree>
@@ -1447,7 +1301,153 @@
           <a:lstStyle/>
           <a:p>
             <a:r>
-              <a:t>Title card for standalone video 5.3. Content slides are identical to the corresponding section of the combined deck KP1_M5_Deck_v0.2.pptx; voice-over is in each slide’s notes.</a:t>
+              <a:t>VO: Then report the national picture upward, on one page, every quarter. How many sectors are live. The re-use rate across them. Which shared platforms are in place. This shows the minister a national capability actually growing — which is what sustains funding across a change of government — and it lets you see early if a sector is drifting from the shared foundation, while correction is still cheap.</a:t>
+            </a:r>
+          </a:p>
+        </p:txBody>
+      </p:sp>
+      <p:sp>
+        <p:nvSpPr>
+          <p:cNvPr id="4" name="Slide Number Placeholder 3"/>
+          <p:cNvSpPr>
+            <a:spLocks noGrp="1"/>
+          </p:cNvSpPr>
+          <p:nvPr>
+            <p:ph type="sldNum" idx="5" sz="quarter"/>
+          </p:nvPr>
+        </p:nvSpPr>
+        <p:spPr/>
+      </p:sp>
+    </p:spTree>
+  </p:cSld>
+  <p:clrMapOvr>
+    <a:masterClrMapping/>
+  </p:clrMapOvr>
+</p:notes>
+</file>
+
+<file path=ppt/notesSlides/notesSlide24.xml><?xml version="1.0" encoding="utf-8"?>
+<p:notes xmlns:a="http://schemas.openxmlformats.org/drawingml/2006/main" xmlns:p="http://schemas.openxmlformats.org/presentationml/2006/main" xmlns:r="http://schemas.openxmlformats.org/officeDocument/2006/relationships">
+  <p:cSld>
+    <p:spTree>
+      <p:nvGrpSpPr>
+        <p:cNvPr id="1" name=""/>
+        <p:cNvGrpSpPr/>
+        <p:nvPr/>
+      </p:nvGrpSpPr>
+      <p:grpSpPr>
+        <a:xfrm>
+          <a:off x="0" y="0"/>
+          <a:ext cx="0" cy="0"/>
+          <a:chOff x="0" y="0"/>
+          <a:chExt cx="0" cy="0"/>
+        </a:xfrm>
+      </p:grpSpPr>
+      <p:sp>
+        <p:nvSpPr>
+          <p:cNvPr id="2" name="Slide Image Placeholder 1"/>
+          <p:cNvSpPr>
+            <a:spLocks noGrp="1"/>
+          </p:cNvSpPr>
+          <p:nvPr>
+            <p:ph type="sldImg" idx="2"/>
+          </p:nvPr>
+        </p:nvSpPr>
+        <p:spPr/>
+      </p:sp>
+      <p:sp>
+        <p:nvSpPr>
+          <p:cNvPr id="3" name="Notes Placeholder 2"/>
+          <p:cNvSpPr>
+            <a:spLocks noGrp="1"/>
+          </p:cNvSpPr>
+          <p:nvPr>
+            <p:ph type="body" idx="3" sz="quarter"/>
+          </p:nvPr>
+        </p:nvSpPr>
+        <p:spPr/>
+        <p:txBody>
+          <a:bodyPr/>
+          <a:lstStyle/>
+          <a:p>
+            <a:r>
+              <a:t>PRACTICE BOX (on-screen only — never read it, never paraphrase it, never point at it). It replaces the narrated handoff: this video ends on the recap and the Sources slide.</a:t>
+            </a:r>
+          </a:p>
+          <a:p/>
+          <a:p>
+            <a:r>
+              <a:t>VO: So the method travels, and the rollout is a wave roadmap: one sector to build the foundations, then sectors one at a time, each cheaper than the last, governed into a single national architecture.</a:t>
+            </a:r>
+          </a:p>
+        </p:txBody>
+      </p:sp>
+      <p:sp>
+        <p:nvSpPr>
+          <p:cNvPr id="4" name="Slide Number Placeholder 3"/>
+          <p:cNvSpPr>
+            <a:spLocks noGrp="1"/>
+          </p:cNvSpPr>
+          <p:nvPr>
+            <p:ph type="sldNum" idx="5" sz="quarter"/>
+          </p:nvPr>
+        </p:nvSpPr>
+        <p:spPr/>
+      </p:sp>
+    </p:spTree>
+  </p:cSld>
+  <p:clrMapOvr>
+    <a:masterClrMapping/>
+  </p:clrMapOvr>
+</p:notes>
+</file>
+
+<file path=ppt/notesSlides/notesSlide25.xml><?xml version="1.0" encoding="utf-8"?>
+<p:notes xmlns:a="http://schemas.openxmlformats.org/drawingml/2006/main" xmlns:p="http://schemas.openxmlformats.org/presentationml/2006/main" xmlns:r="http://schemas.openxmlformats.org/officeDocument/2006/relationships">
+  <p:cSld>
+    <p:spTree>
+      <p:nvGrpSpPr>
+        <p:cNvPr id="1" name=""/>
+        <p:cNvGrpSpPr/>
+        <p:nvPr/>
+      </p:nvGrpSpPr>
+      <p:grpSpPr>
+        <a:xfrm>
+          <a:off x="0" y="0"/>
+          <a:ext cx="0" cy="0"/>
+          <a:chOff x="0" y="0"/>
+          <a:chExt cx="0" cy="0"/>
+        </a:xfrm>
+      </p:grpSpPr>
+      <p:sp>
+        <p:nvSpPr>
+          <p:cNvPr id="2" name="Slide Image Placeholder 1"/>
+          <p:cNvSpPr>
+            <a:spLocks noGrp="1"/>
+          </p:cNvSpPr>
+          <p:nvPr>
+            <p:ph type="sldImg" idx="2"/>
+          </p:nvPr>
+        </p:nvSpPr>
+        <p:spPr/>
+      </p:sp>
+      <p:sp>
+        <p:nvSpPr>
+          <p:cNvPr id="3" name="Notes Placeholder 2"/>
+          <p:cNvSpPr>
+            <a:spLocks noGrp="1"/>
+          </p:cNvSpPr>
+          <p:nvPr>
+            <p:ph type="body" idx="3" sz="quarter"/>
+          </p:nvPr>
+        </p:nvSpPr>
+        <p:spPr/>
+        <p:txBody>
+          <a:bodyPr/>
+          <a:lstStyle/>
+          <a:p>
+            <a:r>
+              <a:t>Sources slide, held ~5 seconds at the end of the video. Links are compiled into the YouTube description per ITU convention; no URLs read aloud.</a:t>
             </a:r>
           </a:p>
         </p:txBody>
@@ -11608,1196 +11608,6 @@
 </p:sldMaster>
 </file>
 
-<file path=ppt/slides/slide1.xml><?xml version="1.0" encoding="utf-8"?>
-<p:sld xmlns:a="http://schemas.openxmlformats.org/drawingml/2006/main" xmlns:r="http://schemas.openxmlformats.org/officeDocument/2006/relationships" xmlns:p="http://schemas.openxmlformats.org/presentationml/2006/main">
-  <p:cSld>
-    <p:spTree>
-      <p:nvGrpSpPr>
-        <p:cNvPr id="1" name=""/>
-        <p:cNvGrpSpPr/>
-        <p:nvPr/>
-      </p:nvGrpSpPr>
-      <p:grpSpPr>
-        <a:xfrm>
-          <a:off x="0" y="0"/>
-          <a:ext cx="0" cy="0"/>
-          <a:chOff x="0" y="0"/>
-          <a:chExt cx="0" cy="0"/>
-        </a:xfrm>
-      </p:grpSpPr>
-      <p:cxnSp>
-        <p:nvCxnSpPr>
-          <p:cNvPr id="11" name="Straight Connector 10">
-            <a:extLst>
-              <a:ext uri="{FF2B5EF4-FFF2-40B4-BE49-F238E27FC236}">
-                <a16:creationId xmlns:a16="http://schemas.microsoft.com/office/drawing/2014/main" id="{D9AD66F2-F7C0-4D03-9150-D28F17AC561D}"/>
-              </a:ext>
-            </a:extLst>
-          </p:cNvPr>
-          <p:cNvCxnSpPr>
-            <a:cxnSpLocks/>
-          </p:cNvCxnSpPr>
-          <p:nvPr/>
-        </p:nvCxnSpPr>
-        <p:spPr>
-          <a:xfrm>
-            <a:off x="373021" y="2198718"/>
-            <a:ext cx="6843567" cy="0"/>
-          </a:xfrm>
-          <a:prstGeom prst="line">
-            <a:avLst/>
-          </a:prstGeom>
-          <a:ln w="12700">
-            <a:solidFill>
-              <a:srgbClr val="009CD6"/>
-            </a:solidFill>
-          </a:ln>
-        </p:spPr>
-        <p:style>
-          <a:lnRef idx="1">
-            <a:schemeClr val="accent1"/>
-          </a:lnRef>
-          <a:fillRef idx="0">
-            <a:schemeClr val="accent1"/>
-          </a:fillRef>
-          <a:effectRef idx="0">
-            <a:schemeClr val="accent1"/>
-          </a:effectRef>
-          <a:fontRef idx="minor">
-            <a:schemeClr val="tx1"/>
-          </a:fontRef>
-        </p:style>
-      </p:cxnSp>
-      <p:sp>
-        <p:nvSpPr>
-          <p:cNvPr id="12" name="Title 9">
-            <a:extLst>
-              <a:ext uri="{FF2B5EF4-FFF2-40B4-BE49-F238E27FC236}">
-                <a16:creationId xmlns:a16="http://schemas.microsoft.com/office/drawing/2014/main" id="{EEB08032-CE0E-4986-AEDF-A41026C0E8B9}"/>
-              </a:ext>
-            </a:extLst>
-          </p:cNvPr>
-          <p:cNvSpPr txBox="1">
-            <a:spLocks/>
-          </p:cNvSpPr>
-          <p:nvPr/>
-        </p:nvSpPr>
-        <p:spPr>
-          <a:xfrm>
-            <a:off x="237734" y="702833"/>
-            <a:ext cx="6432007" cy="1218817"/>
-          </a:xfrm>
-          <a:prstGeom prst="rect">
-            <a:avLst/>
-          </a:prstGeom>
-        </p:spPr>
-        <p:txBody>
-          <a:bodyPr anchor="b">
-            <a:noAutofit/>
-          </a:bodyPr>
-          <a:lstStyle>
-            <a:lvl1pPr algn="l" defTabSz="914400" rtl="0" eaLnBrk="1" latinLnBrk="0" hangingPunct="1">
-              <a:lnSpc>
-                <a:spcPct val="90000"/>
-              </a:lnSpc>
-              <a:spcBef>
-                <a:spcPct val="0"/>
-              </a:spcBef>
-              <a:buNone/>
-              <a:defRPr sz="4000" kern="1200">
-                <a:solidFill>
-                  <a:schemeClr val="bg1"/>
-                </a:solidFill>
-                <a:latin typeface="Arial" panose="020B0604020202020204" pitchFamily="34" charset="0"/>
-                <a:ea typeface="+mj-ea"/>
-                <a:cs typeface="Arial" panose="020B0604020202020204" pitchFamily="34" charset="0"/>
-              </a:defRPr>
-            </a:lvl1pPr>
-          </a:lstStyle>
-          <a:p>
-            <a:r>
-              <a:rPr sz="2400" b="1" i="0">
-                <a:solidFill>
-                  <a:srgbClr val="1A1A1A"/>
-                </a:solidFill>
-                <a:latin typeface="Arial"/>
-              </a:rPr>
-              <a:t>5.3 — Roll it out across sectors — and why the second is cheaper</a:t>
-            </a:r>
-          </a:p>
-        </p:txBody>
-      </p:sp>
-      <p:pic>
-        <p:nvPicPr>
-          <p:cNvPr id="7" name="Picture 6">
-            <a:extLst>
-              <a:ext uri="{FF2B5EF4-FFF2-40B4-BE49-F238E27FC236}">
-                <a16:creationId xmlns:a16="http://schemas.microsoft.com/office/drawing/2014/main" id="{A2066351-C569-4C4C-A096-308777FCDC32}"/>
-              </a:ext>
-            </a:extLst>
-          </p:cNvPr>
-          <p:cNvPicPr>
-            <a:picLocks noChangeAspect="1"/>
-          </p:cNvPicPr>
-          <p:nvPr/>
-        </p:nvPicPr>
-        <p:blipFill>
-          <a:blip r:embed="rId2">
-            <a:extLst>
-              <a:ext uri="{28A0092B-C50C-407E-A947-70E740481C1C}">
-                <a14:useLocalDpi xmlns:a14="http://schemas.microsoft.com/office/drawing/2010/main" val="0"/>
-              </a:ext>
-            </a:extLst>
-          </a:blip>
-          <a:srcRect t="20219" b="14729"/>
-          <a:stretch>
-            <a:fillRect/>
-          </a:stretch>
-        </p:blipFill>
-        <p:spPr>
-          <a:xfrm>
-            <a:off x="0" y="5620871"/>
-            <a:ext cx="1323975" cy="1218816"/>
-          </a:xfrm>
-          <a:prstGeom prst="rect">
-            <a:avLst/>
-          </a:prstGeom>
-        </p:spPr>
-      </p:pic>
-      <p:sp>
-        <p:nvSpPr>
-          <p:cNvPr id="14" name="Title 9">
-            <a:extLst>
-              <a:ext uri="{FF2B5EF4-FFF2-40B4-BE49-F238E27FC236}">
-                <a16:creationId xmlns:a16="http://schemas.microsoft.com/office/drawing/2014/main" id="{B5087B80-3EE4-1881-0130-ED58CA625092}"/>
-              </a:ext>
-            </a:extLst>
-          </p:cNvPr>
-          <p:cNvSpPr txBox="1">
-            <a:spLocks/>
-          </p:cNvSpPr>
-          <p:nvPr/>
-        </p:nvSpPr>
-        <p:spPr>
-          <a:xfrm>
-            <a:off x="284452" y="2475786"/>
-            <a:ext cx="6382893" cy="953213"/>
-          </a:xfrm>
-          <a:prstGeom prst="rect">
-            <a:avLst/>
-          </a:prstGeom>
-        </p:spPr>
-        <p:txBody>
-          <a:bodyPr anchor="t">
-            <a:noAutofit/>
-          </a:bodyPr>
-          <a:lstStyle>
-            <a:lvl1pPr algn="l" defTabSz="914400" rtl="0" eaLnBrk="1" latinLnBrk="0" hangingPunct="1">
-              <a:lnSpc>
-                <a:spcPct val="90000"/>
-              </a:lnSpc>
-              <a:spcBef>
-                <a:spcPct val="0"/>
-              </a:spcBef>
-              <a:buNone/>
-              <a:defRPr sz="4000" kern="1200">
-                <a:solidFill>
-                  <a:schemeClr val="bg1"/>
-                </a:solidFill>
-                <a:latin typeface="Arial" panose="020B0604020202020204" pitchFamily="34" charset="0"/>
-                <a:ea typeface="+mj-ea"/>
-                <a:cs typeface="Arial" panose="020B0604020202020204" pitchFamily="34" charset="0"/>
-              </a:defRPr>
-            </a:lvl1pPr>
-          </a:lstStyle>
-          <a:p>
-            <a:pPr marL="0" marR="0" lvl="0" indent="0" rtl="0">
-              <a:spcBef>
-                <a:spcPts val="600"/>
-              </a:spcBef>
-              <a:spcAft>
-                <a:spcPts val="0"/>
-              </a:spcAft>
-              <a:buNone/>
-            </a:pPr>
-            <a:r>
-              <a:rPr sz="1300" b="1" i="0">
-                <a:solidFill>
-                  <a:srgbClr val="006E96"/>
-                </a:solidFill>
-                <a:latin typeface="Arial"/>
-              </a:rPr>
-              <a:t>KP1 · Government Enterprise Architecture · Module 5 · Video 5.3</a:t>
-            </a:r>
-          </a:p>
-          <a:p>
-            <a:r>
-              <a:rPr sz="1200" b="0" i="1">
-                <a:solidFill>
-                  <a:srgbClr val="595959"/>
-                </a:solidFill>
-                <a:latin typeface="Arial"/>
-              </a:rPr>
-              <a:t>The method is sector-agnostic — only the record at the centre changes — so roll it out as a wave roadmap: one sector first to build the shared platforms, then sectors one at a time, each cheaper than the last, governed into a single national architecture.</a:t>
-            </a:r>
-          </a:p>
-        </p:txBody>
-      </p:sp>
-      <p:sp>
-        <p:nvSpPr>
-          <p:cNvPr id="17" name="Title 9">
-            <a:extLst>
-              <a:ext uri="{FF2B5EF4-FFF2-40B4-BE49-F238E27FC236}">
-                <a16:creationId xmlns:a16="http://schemas.microsoft.com/office/drawing/2014/main" id="{5E8796F7-DD26-D250-5E97-B38B22298E72}"/>
-              </a:ext>
-            </a:extLst>
-          </p:cNvPr>
-          <p:cNvSpPr txBox="1">
-            <a:spLocks/>
-          </p:cNvSpPr>
-          <p:nvPr/>
-        </p:nvSpPr>
-        <p:spPr>
-          <a:xfrm>
-            <a:off x="284452" y="4363897"/>
-            <a:ext cx="6382893" cy="953213"/>
-          </a:xfrm>
-          <a:prstGeom prst="rect">
-            <a:avLst/>
-          </a:prstGeom>
-        </p:spPr>
-        <p:txBody>
-          <a:bodyPr anchor="t">
-            <a:noAutofit/>
-          </a:bodyPr>
-          <a:lstStyle>
-            <a:lvl1pPr algn="l" defTabSz="914400" rtl="0" eaLnBrk="1" latinLnBrk="0" hangingPunct="1">
-              <a:lnSpc>
-                <a:spcPct val="90000"/>
-              </a:lnSpc>
-              <a:spcBef>
-                <a:spcPct val="0"/>
-              </a:spcBef>
-              <a:buNone/>
-              <a:defRPr sz="4000" kern="1200">
-                <a:solidFill>
-                  <a:schemeClr val="bg1"/>
-                </a:solidFill>
-                <a:latin typeface="Arial" panose="020B0604020202020204" pitchFamily="34" charset="0"/>
-                <a:ea typeface="+mj-ea"/>
-                <a:cs typeface="Arial" panose="020B0604020202020204" pitchFamily="34" charset="0"/>
-              </a:defRPr>
-            </a:lvl1pPr>
-          </a:lstStyle>
-          <a:p>
-            <a:pPr marL="0" marR="0" lvl="0" indent="0" rtl="0">
-              <a:spcBef>
-                <a:spcPts val="600"/>
-              </a:spcBef>
-              <a:spcAft>
-                <a:spcPts val="1200"/>
-              </a:spcAft>
-              <a:buNone/>
-            </a:pPr>
-            <a:r>
-              <a:rPr sz="1400" b="1" i="0">
-                <a:solidFill>
-                  <a:srgbClr val="1A1A1A"/>
-                </a:solidFill>
-                <a:latin typeface="Arial"/>
-              </a:rPr>
-              <a:t>Length: </a:t>
-            </a:r>
-            <a:r>
-              <a:rPr sz="1400" b="0" i="0">
-                <a:solidFill>
-                  <a:srgbClr val="1A1A1A"/>
-                </a:solidFill>
-                <a:latin typeface="Arial"/>
-              </a:rPr>
-              <a:t>~5 mins</a:t>
-            </a:r>
-          </a:p>
-          <a:p>
-            <a:r>
-              <a:rPr sz="1400" b="1" i="0">
-                <a:solidFill>
-                  <a:srgbClr val="1A1A1A"/>
-                </a:solidFill>
-                <a:latin typeface="Arial"/>
-              </a:rPr>
-              <a:t>Target audience: </a:t>
-            </a:r>
-            <a:r>
-              <a:rPr sz="1400" b="0" i="0">
-                <a:solidFill>
-                  <a:srgbClr val="1A1A1A"/>
-                </a:solidFill>
-                <a:latin typeface="Arial"/>
-              </a:rPr>
-              <a:t>Director-general · head of a sectoral ICT unit · technical secretary</a:t>
-            </a:r>
-          </a:p>
-        </p:txBody>
-      </p:sp>
-      <p:sp>
-        <p:nvSpPr>
-          <p:cNvPr id="18" name="Rectangle 17"/>
-          <p:cNvSpPr/>
-          <p:nvPr/>
-        </p:nvSpPr>
-        <p:spPr>
-          <a:xfrm>
-            <a:off x="7022592" y="0"/>
-            <a:ext cx="5169103" cy="6858000"/>
-          </a:xfrm>
-          <a:prstGeom prst="rect">
-            <a:avLst/>
-          </a:prstGeom>
-          <a:solidFill>
-            <a:srgbClr val="009CD6"/>
-          </a:solidFill>
-          <a:ln>
-            <a:noFill/>
-          </a:ln>
-          <a:effectLst/>
-        </p:spPr>
-        <p:style>
-          <a:lnRef idx="1">
-            <a:schemeClr val="accent1"/>
-          </a:lnRef>
-          <a:fillRef idx="3">
-            <a:schemeClr val="accent1"/>
-          </a:fillRef>
-          <a:effectRef idx="2">
-            <a:schemeClr val="accent1"/>
-          </a:effectRef>
-          <a:fontRef idx="minor">
-            <a:schemeClr val="lt1"/>
-          </a:fontRef>
-        </p:style>
-        <p:txBody>
-          <a:bodyPr rtlCol="0" anchor="ctr"/>
-          <a:lstStyle/>
-          <a:p>
-            <a:pPr algn="ctr"/>
-          </a:p>
-        </p:txBody>
-      </p:sp>
-      <p:sp>
-        <p:nvSpPr>
-          <p:cNvPr id="19" name="TextBox 18"/>
-          <p:cNvSpPr txBox="1"/>
-          <p:nvPr/>
-        </p:nvSpPr>
-        <p:spPr>
-          <a:xfrm>
-            <a:off x="7452360" y="457200"/>
-            <a:ext cx="4297680" cy="457200"/>
-          </a:xfrm>
-          <a:prstGeom prst="rect">
-            <a:avLst/>
-          </a:prstGeom>
-          <a:noFill/>
-        </p:spPr>
-        <p:txBody>
-          <a:bodyPr wrap="square">
-            <a:spAutoFit/>
-          </a:bodyPr>
-          <a:lstStyle/>
-          <a:p>
-            <a:r>
-              <a:rPr sz="1100" b="1" i="0">
-                <a:solidFill>
-                  <a:srgbClr val="E5F5FB"/>
-                </a:solidFill>
-                <a:latin typeface="Arial"/>
-              </a:rPr>
-              <a:t>THE CASE YOU CARRY INTO THE ROOM</a:t>
-            </a:r>
-          </a:p>
-        </p:txBody>
-      </p:sp>
-      <p:sp>
-        <p:nvSpPr>
-          <p:cNvPr id="20" name="Rounded Rectangle 19"/>
-          <p:cNvSpPr/>
-          <p:nvPr/>
-        </p:nvSpPr>
-        <p:spPr>
-          <a:xfrm>
-            <a:off x="7452360" y="960120"/>
-            <a:ext cx="3840480" cy="658368"/>
-          </a:xfrm>
-          <a:prstGeom prst="roundRect">
-            <a:avLst>
-              <a:gd name="adj" fmla="val 14000"/>
-            </a:avLst>
-          </a:prstGeom>
-          <a:solidFill>
-            <a:srgbClr val="FFFFFF"/>
-          </a:solidFill>
-          <a:ln>
-            <a:noFill/>
-          </a:ln>
-          <a:effectLst/>
-        </p:spPr>
-        <p:style>
-          <a:lnRef idx="1">
-            <a:schemeClr val="accent1"/>
-          </a:lnRef>
-          <a:fillRef idx="3">
-            <a:schemeClr val="accent1"/>
-          </a:fillRef>
-          <a:effectRef idx="2">
-            <a:schemeClr val="accent1"/>
-          </a:effectRef>
-          <a:fontRef idx="minor">
-            <a:schemeClr val="lt1"/>
-          </a:fontRef>
-        </p:style>
-        <p:txBody>
-          <a:bodyPr rtlCol="0" anchor="ctr" lIns="164592" wrap="square"/>
-          <a:lstStyle/>
-          <a:p>
-            <a:pPr algn="ctr"/>
-            <a:r>
-              <a:rPr sz="1500" b="1" i="0">
-                <a:solidFill>
-                  <a:srgbClr val="1A1A1A"/>
-                </a:solidFill>
-                <a:latin typeface="Arial"/>
-              </a:rPr>
-              <a:t>Proven — four real governments</a:t>
-            </a:r>
-          </a:p>
-        </p:txBody>
-      </p:sp>
-      <p:sp>
-        <p:nvSpPr>
-          <p:cNvPr id="21" name="Rounded Rectangle 20"/>
-          <p:cNvSpPr/>
-          <p:nvPr/>
-        </p:nvSpPr>
-        <p:spPr>
-          <a:xfrm>
-            <a:off x="7452360" y="1892808"/>
-            <a:ext cx="3840480" cy="658368"/>
-          </a:xfrm>
-          <a:prstGeom prst="roundRect">
-            <a:avLst>
-              <a:gd name="adj" fmla="val 14000"/>
-            </a:avLst>
-          </a:prstGeom>
-          <a:solidFill>
-            <a:srgbClr val="FFFFFF"/>
-          </a:solidFill>
-          <a:ln>
-            <a:noFill/>
-          </a:ln>
-          <a:effectLst/>
-        </p:spPr>
-        <p:style>
-          <a:lnRef idx="1">
-            <a:schemeClr val="accent1"/>
-          </a:lnRef>
-          <a:fillRef idx="3">
-            <a:schemeClr val="accent1"/>
-          </a:fillRef>
-          <a:effectRef idx="2">
-            <a:schemeClr val="accent1"/>
-          </a:effectRef>
-          <a:fontRef idx="minor">
-            <a:schemeClr val="lt1"/>
-          </a:fontRef>
-        </p:style>
-        <p:txBody>
-          <a:bodyPr rtlCol="0" anchor="ctr" lIns="164592" wrap="square"/>
-          <a:lstStyle/>
-          <a:p>
-            <a:pPr algn="ctr"/>
-            <a:r>
-              <a:rPr sz="1500" b="1" i="0">
-                <a:solidFill>
-                  <a:srgbClr val="1A1A1A"/>
-                </a:solidFill>
-                <a:latin typeface="Arial"/>
-              </a:rPr>
-              <a:t>Portable — sector after sector</a:t>
-            </a:r>
-          </a:p>
-        </p:txBody>
-      </p:sp>
-      <p:sp>
-        <p:nvSpPr>
-          <p:cNvPr id="22" name="Rounded Rectangle 21"/>
-          <p:cNvSpPr/>
-          <p:nvPr/>
-        </p:nvSpPr>
-        <p:spPr>
-          <a:xfrm>
-            <a:off x="7452360" y="2825496"/>
-            <a:ext cx="3840480" cy="658368"/>
-          </a:xfrm>
-          <a:prstGeom prst="roundRect">
-            <a:avLst>
-              <a:gd name="adj" fmla="val 14000"/>
-            </a:avLst>
-          </a:prstGeom>
-          <a:solidFill>
-            <a:srgbClr val="FFFFFF"/>
-          </a:solidFill>
-          <a:ln>
-            <a:noFill/>
-          </a:ln>
-          <a:effectLst/>
-        </p:spPr>
-        <p:style>
-          <a:lnRef idx="1">
-            <a:schemeClr val="accent1"/>
-          </a:lnRef>
-          <a:fillRef idx="3">
-            <a:schemeClr val="accent1"/>
-          </a:fillRef>
-          <a:effectRef idx="2">
-            <a:schemeClr val="accent1"/>
-          </a:effectRef>
-          <a:fontRef idx="minor">
-            <a:schemeClr val="lt1"/>
-          </a:fontRef>
-        </p:style>
-        <p:txBody>
-          <a:bodyPr rtlCol="0" anchor="ctr" lIns="164592" wrap="square"/>
-          <a:lstStyle/>
-          <a:p>
-            <a:pPr algn="ctr"/>
-            <a:r>
-              <a:rPr sz="1500" b="1" i="0">
-                <a:solidFill>
-                  <a:srgbClr val="1A1A1A"/>
-                </a:solidFill>
-                <a:latin typeface="Arial"/>
-              </a:rPr>
-              <a:t>The commitment — the one page</a:t>
-            </a:r>
-          </a:p>
-        </p:txBody>
-      </p:sp>
-      <p:sp>
-        <p:nvSpPr>
-          <p:cNvPr id="23" name="Rounded Rectangle 22"/>
-          <p:cNvSpPr/>
-          <p:nvPr/>
-        </p:nvSpPr>
-        <p:spPr>
-          <a:xfrm>
-            <a:off x="7452360" y="3758184"/>
-            <a:ext cx="3840480" cy="658368"/>
-          </a:xfrm>
-          <a:prstGeom prst="roundRect">
-            <a:avLst>
-              <a:gd name="adj" fmla="val 14000"/>
-            </a:avLst>
-          </a:prstGeom>
-          <a:solidFill>
-            <a:srgbClr val="FFFFFF"/>
-          </a:solidFill>
-          <a:ln>
-            <a:noFill/>
-          </a:ln>
-          <a:effectLst/>
-        </p:spPr>
-        <p:style>
-          <a:lnRef idx="1">
-            <a:schemeClr val="accent1"/>
-          </a:lnRef>
-          <a:fillRef idx="3">
-            <a:schemeClr val="accent1"/>
-          </a:fillRef>
-          <a:effectRef idx="2">
-            <a:schemeClr val="accent1"/>
-          </a:effectRef>
-          <a:fontRef idx="minor">
-            <a:schemeClr val="lt1"/>
-          </a:fontRef>
-        </p:style>
-        <p:txBody>
-          <a:bodyPr rtlCol="0" anchor="ctr" lIns="164592" wrap="square"/>
-          <a:lstStyle/>
-          <a:p>
-            <a:pPr algn="ctr"/>
-            <a:r>
-              <a:rPr sz="1500" b="1" i="0">
-                <a:solidFill>
-                  <a:srgbClr val="1A1A1A"/>
-                </a:solidFill>
-                <a:latin typeface="Arial"/>
-              </a:rPr>
-              <a:t>The capability — your own people</a:t>
-            </a:r>
-          </a:p>
-        </p:txBody>
-      </p:sp>
-      <p:sp>
-        <p:nvSpPr>
-          <p:cNvPr id="24" name="Rounded Rectangle 23"/>
-          <p:cNvSpPr/>
-          <p:nvPr/>
-        </p:nvSpPr>
-        <p:spPr>
-          <a:xfrm>
-            <a:off x="7452360" y="4690872"/>
-            <a:ext cx="3840480" cy="658368"/>
-          </a:xfrm>
-          <a:prstGeom prst="roundRect">
-            <a:avLst>
-              <a:gd name="adj" fmla="val 14000"/>
-            </a:avLst>
-          </a:prstGeom>
-          <a:solidFill>
-            <a:srgbClr val="006E96"/>
-          </a:solidFill>
-          <a:ln>
-            <a:noFill/>
-          </a:ln>
-          <a:effectLst/>
-        </p:spPr>
-        <p:style>
-          <a:lnRef idx="1">
-            <a:schemeClr val="accent1"/>
-          </a:lnRef>
-          <a:fillRef idx="3">
-            <a:schemeClr val="accent1"/>
-          </a:fillRef>
-          <a:effectRef idx="2">
-            <a:schemeClr val="accent1"/>
-          </a:effectRef>
-          <a:fontRef idx="minor">
-            <a:schemeClr val="lt1"/>
-          </a:fontRef>
-        </p:style>
-        <p:txBody>
-          <a:bodyPr rtlCol="0" anchor="ctr" lIns="164592" wrap="square"/>
-          <a:lstStyle/>
-          <a:p>
-            <a:pPr algn="ctr"/>
-            <a:r>
-              <a:rPr sz="1500" b="1" i="0">
-                <a:solidFill>
-                  <a:srgbClr val="FFFFFF"/>
-                </a:solidFill>
-                <a:latin typeface="Arial"/>
-              </a:rPr>
-              <a:t>Necessary now, not just useful</a:t>
-            </a:r>
-          </a:p>
-        </p:txBody>
-      </p:sp>
-      <p:sp>
-        <p:nvSpPr>
-          <p:cNvPr id="25" name="TextBox 24"/>
-          <p:cNvSpPr txBox="1"/>
-          <p:nvPr/>
-        </p:nvSpPr>
-        <p:spPr>
-          <a:xfrm>
-            <a:off x="7452360" y="5806440"/>
-            <a:ext cx="4297680" cy="731520"/>
-          </a:xfrm>
-          <a:prstGeom prst="rect">
-            <a:avLst/>
-          </a:prstGeom>
-          <a:noFill/>
-        </p:spPr>
-        <p:txBody>
-          <a:bodyPr wrap="square">
-            <a:spAutoFit/>
-          </a:bodyPr>
-          <a:lstStyle/>
-          <a:p>
-            <a:r>
-              <a:rPr sz="1200" b="0" i="0">
-                <a:solidFill>
-                  <a:srgbClr val="FFFFFF"/>
-                </a:solidFill>
-                <a:latin typeface="Arial"/>
-              </a:rPr>
-              <a:t>4 governments · 4 killers to design out · 1 page for the minister</a:t>
-            </a:r>
-          </a:p>
-        </p:txBody>
-      </p:sp>
-    </p:spTree>
-    <p:extLst>
-      <p:ext uri="{BB962C8B-B14F-4D97-AF65-F5344CB8AC3E}">
-        <p14:creationId xmlns:p14="http://schemas.microsoft.com/office/powerpoint/2010/main" val="1196800265"/>
-      </p:ext>
-    </p:extLst>
-  </p:cSld>
-  <p:clrMapOvr>
-    <a:masterClrMapping/>
-  </p:clrMapOvr>
-</p:sld>
-</file>
-
-<file path=ppt/slides/slide16.xml><?xml version="1.0" encoding="utf-8"?>
-<p:sld xmlns:a="http://schemas.openxmlformats.org/drawingml/2006/main" xmlns:p="http://schemas.openxmlformats.org/presentationml/2006/main" xmlns:r="http://schemas.openxmlformats.org/officeDocument/2006/relationships">
-  <p:cSld>
-    <p:spTree>
-      <p:nvGrpSpPr>
-        <p:cNvPr id="1" name=""/>
-        <p:cNvGrpSpPr/>
-        <p:nvPr/>
-      </p:nvGrpSpPr>
-      <p:grpSpPr/>
-      <p:sp>
-        <p:nvSpPr>
-          <p:cNvPr id="2" name="TextBox 1"/>
-          <p:cNvSpPr txBox="1"/>
-          <p:nvPr/>
-        </p:nvSpPr>
-        <p:spPr>
-          <a:xfrm>
-            <a:off x="822960" y="822960"/>
-            <a:ext cx="7315200" cy="457200"/>
-          </a:xfrm>
-          <a:prstGeom prst="rect">
-            <a:avLst/>
-          </a:prstGeom>
-          <a:noFill/>
-        </p:spPr>
-        <p:txBody>
-          <a:bodyPr wrap="square">
-            <a:spAutoFit/>
-          </a:bodyPr>
-          <a:lstStyle/>
-          <a:p>
-            <a:r>
-              <a:rPr sz="1200" b="1" i="0">
-                <a:solidFill>
-                  <a:srgbClr val="595959"/>
-                </a:solidFill>
-                <a:latin typeface="Arial"/>
-              </a:rPr>
-              <a:t>KP1 · MODULE 5 · VIDEO 5.3</a:t>
-            </a:r>
-          </a:p>
-        </p:txBody>
-      </p:sp>
-      <p:sp>
-        <p:nvSpPr>
-          <p:cNvPr id="3" name="TextBox 2"/>
-          <p:cNvSpPr txBox="1"/>
-          <p:nvPr/>
-        </p:nvSpPr>
-        <p:spPr>
-          <a:xfrm>
-            <a:off x="822960" y="1828800"/>
-            <a:ext cx="2011680" cy="1097280"/>
-          </a:xfrm>
-          <a:prstGeom prst="rect">
-            <a:avLst/>
-          </a:prstGeom>
-          <a:noFill/>
-        </p:spPr>
-        <p:txBody>
-          <a:bodyPr wrap="square">
-            <a:spAutoFit/>
-          </a:bodyPr>
-          <a:lstStyle/>
-          <a:p>
-            <a:r>
-              <a:rPr sz="6000" b="1" i="0">
-                <a:solidFill>
-                  <a:srgbClr val="009CD6"/>
-                </a:solidFill>
-                <a:latin typeface="Arial"/>
-              </a:rPr>
-              <a:t>5.3</a:t>
-            </a:r>
-          </a:p>
-        </p:txBody>
-      </p:sp>
-      <p:sp>
-        <p:nvSpPr>
-          <p:cNvPr id="4" name="TextBox 3"/>
-          <p:cNvSpPr txBox="1"/>
-          <p:nvPr/>
-        </p:nvSpPr>
-        <p:spPr>
-          <a:xfrm>
-            <a:off x="822960" y="2880360"/>
-            <a:ext cx="9601200" cy="1371600"/>
-          </a:xfrm>
-          <a:prstGeom prst="rect">
-            <a:avLst/>
-          </a:prstGeom>
-          <a:noFill/>
-        </p:spPr>
-        <p:txBody>
-          <a:bodyPr wrap="square">
-            <a:spAutoFit/>
-          </a:bodyPr>
-          <a:lstStyle/>
-          <a:p>
-            <a:r>
-              <a:rPr sz="3400" b="1" i="0">
-                <a:solidFill>
-                  <a:srgbClr val="1A1A1A"/>
-                </a:solidFill>
-                <a:latin typeface="Arial"/>
-              </a:rPr>
-              <a:t>Roll it out across sectors — and why the second is cheaper</a:t>
-            </a:r>
-          </a:p>
-        </p:txBody>
-      </p:sp>
-      <p:sp>
-        <p:nvSpPr>
-          <p:cNvPr id="5" name="TextBox 4"/>
-          <p:cNvSpPr txBox="1"/>
-          <p:nvPr/>
-        </p:nvSpPr>
-        <p:spPr>
-          <a:xfrm>
-            <a:off x="822960" y="4343400"/>
-            <a:ext cx="9875520" cy="1554480"/>
-          </a:xfrm>
-          <a:prstGeom prst="rect">
-            <a:avLst/>
-          </a:prstGeom>
-          <a:noFill/>
-        </p:spPr>
-        <p:txBody>
-          <a:bodyPr wrap="square">
-            <a:spAutoFit/>
-          </a:bodyPr>
-          <a:lstStyle/>
-          <a:p>
-            <a:r>
-              <a:rPr sz="1700" b="0" i="1">
-                <a:solidFill>
-                  <a:srgbClr val="595959"/>
-                </a:solidFill>
-                <a:latin typeface="Arial"/>
-              </a:rPr>
-              <a:t>The method is sector-agnostic — only the record at the centre changes — so roll it out as a wave roadmap: one sector first to build the shared platforms, then sectors one at a time, each cheaper than the last, governed into a single national architecture.</a:t>
-            </a:r>
-          </a:p>
-        </p:txBody>
-      </p:sp>
-      <p:sp>
-        <p:nvSpPr>
-          <p:cNvPr id="6" name="TextBox 5"/>
-          <p:cNvSpPr txBox="1"/>
-          <p:nvPr/>
-        </p:nvSpPr>
-        <p:spPr>
-          <a:xfrm>
-            <a:off x="822960" y="5989320"/>
-            <a:ext cx="7315200" cy="365760"/>
-          </a:xfrm>
-          <a:prstGeom prst="rect">
-            <a:avLst/>
-          </a:prstGeom>
-          <a:noFill/>
-        </p:spPr>
-        <p:txBody>
-          <a:bodyPr wrap="square">
-            <a:spAutoFit/>
-          </a:bodyPr>
-          <a:lstStyle/>
-          <a:p>
-            <a:r>
-              <a:rPr sz="1200" b="0" i="0">
-                <a:solidFill>
-                  <a:srgbClr val="595959"/>
-                </a:solidFill>
-                <a:latin typeface="Arial"/>
-              </a:rPr>
-              <a:t>~5 minutes · standalone video · voice-over on text slides</a:t>
-            </a:r>
-          </a:p>
-        </p:txBody>
-      </p:sp>
-    </p:spTree>
-  </p:cSld>
-  <p:clrMapOvr>
-    <a:masterClrMapping/>
-  </p:clrMapOvr>
-</p:sld>
-</file>
-
-<file path=ppt/slides/slide17.xml><?xml version="1.0" encoding="utf-8"?>
-<p:sld xmlns:a="http://schemas.openxmlformats.org/drawingml/2006/main" xmlns:p="http://schemas.openxmlformats.org/presentationml/2006/main" xmlns:r="http://schemas.openxmlformats.org/officeDocument/2006/relationships">
-  <p:cSld>
-    <p:spTree>
-      <p:nvGrpSpPr>
-        <p:cNvPr id="1" name=""/>
-        <p:cNvGrpSpPr/>
-        <p:nvPr/>
-      </p:nvGrpSpPr>
-      <p:grpSpPr/>
-      <p:sp>
-        <p:nvSpPr>
-          <p:cNvPr id="2" name="Rectangle 1"/>
-          <p:cNvSpPr/>
-          <p:nvPr/>
-        </p:nvSpPr>
-        <p:spPr>
-          <a:xfrm>
-            <a:off x="457200" y="384048"/>
-            <a:ext cx="45720" cy="256032"/>
-          </a:xfrm>
-          <a:prstGeom prst="rect">
-            <a:avLst/>
-          </a:prstGeom>
-          <a:solidFill>
-            <a:srgbClr val="009CD6"/>
-          </a:solidFill>
-          <a:ln>
-            <a:noFill/>
-          </a:ln>
-          <a:effectLst/>
-        </p:spPr>
-        <p:style>
-          <a:lnRef idx="1">
-            <a:schemeClr val="accent1"/>
-          </a:lnRef>
-          <a:fillRef idx="3">
-            <a:schemeClr val="accent1"/>
-          </a:fillRef>
-          <a:effectRef idx="2">
-            <a:schemeClr val="accent1"/>
-          </a:effectRef>
-          <a:fontRef idx="minor">
-            <a:schemeClr val="lt1"/>
-          </a:fontRef>
-        </p:style>
-        <p:txBody>
-          <a:bodyPr rtlCol="0" anchor="ctr"/>
-          <a:lstStyle/>
-          <a:p>
-            <a:pPr algn="ctr"/>
-          </a:p>
-        </p:txBody>
-      </p:sp>
-      <p:sp>
-        <p:nvSpPr>
-          <p:cNvPr id="3" name="TextBox 2"/>
-          <p:cNvSpPr txBox="1"/>
-          <p:nvPr/>
-        </p:nvSpPr>
-        <p:spPr>
-          <a:xfrm>
-            <a:off x="621792" y="274320"/>
-            <a:ext cx="11247120" cy="914400"/>
-          </a:xfrm>
-          <a:prstGeom prst="rect">
-            <a:avLst/>
-          </a:prstGeom>
-          <a:noFill/>
-        </p:spPr>
-        <p:txBody>
-          <a:bodyPr wrap="square">
-            <a:spAutoFit/>
-          </a:bodyPr>
-          <a:lstStyle/>
-          <a:p>
-            <a:r>
-              <a:rPr sz="2800" b="1" i="0">
-                <a:solidFill>
-                  <a:srgbClr val="1A1A1A"/>
-                </a:solidFill>
-                <a:latin typeface="Arial"/>
-              </a:rPr>
-              <a:t>Most of the method does not change — only the record at the centre does</a:t>
-            </a:r>
-          </a:p>
-        </p:txBody>
-      </p:sp>
-      <p:sp>
-        <p:nvSpPr>
-          <p:cNvPr id="4" name="TextBox 3"/>
-          <p:cNvSpPr txBox="1"/>
-          <p:nvPr/>
-        </p:nvSpPr>
-        <p:spPr>
-          <a:xfrm>
-            <a:off x="658368" y="1600200"/>
-            <a:ext cx="10881360" cy="2194560"/>
-          </a:xfrm>
-          <a:prstGeom prst="rect">
-            <a:avLst/>
-          </a:prstGeom>
-          <a:noFill/>
-        </p:spPr>
-        <p:txBody>
-          <a:bodyPr wrap="square">
-            <a:spAutoFit/>
-          </a:bodyPr>
-          <a:lstStyle/>
-          <a:p>
-            <a:pPr>
-              <a:spcAft>
-                <a:spcPts val="1200"/>
-              </a:spcAft>
-            </a:pPr>
-            <a:r>
-              <a:rPr sz="2000" b="0" i="0">
-                <a:solidFill>
-                  <a:srgbClr val="1A1A1A"/>
-                </a:solidFill>
-                <a:latin typeface="Arial"/>
-              </a:rPr>
-              <a:t>The five phases, the four sign-offs, the six deliverables, reuse-before-build, the binding board — none of it is sector-specific.</a:t>
-            </a:r>
-          </a:p>
-          <a:p>
-            <a:pPr>
-              <a:spcAft>
-                <a:spcPts val="1200"/>
-              </a:spcAft>
-            </a:pPr>
-            <a:r>
-              <a:rPr sz="2000" b="0" i="0">
-                <a:solidFill>
-                  <a:srgbClr val="1A1A1A"/>
-                </a:solidFill>
-                <a:latin typeface="Arial"/>
-              </a:rPr>
-              <a:t>Only the record at the centre changes: a learner, a patient, a farmer, a beneficiary. Different domain, identical shape — registered several times, re-entered on paper, blocking a flagship the minister has promised.</a:t>
-            </a:r>
-          </a:p>
-        </p:txBody>
-      </p:sp>
-      <p:sp>
-        <p:nvSpPr>
-          <p:cNvPr id="5" name="Rounded Rectangle 4"/>
-          <p:cNvSpPr/>
-          <p:nvPr/>
-        </p:nvSpPr>
-        <p:spPr>
-          <a:xfrm>
-            <a:off x="658368" y="3977639"/>
-            <a:ext cx="10881360" cy="1325880"/>
-          </a:xfrm>
-          <a:prstGeom prst="roundRect">
-            <a:avLst>
-              <a:gd name="adj" fmla="val 4500"/>
-            </a:avLst>
-          </a:prstGeom>
-          <a:solidFill>
-            <a:srgbClr val="E5F5FB"/>
-          </a:solidFill>
-          <a:ln>
-            <a:noFill/>
-          </a:ln>
-          <a:effectLst/>
-        </p:spPr>
-        <p:style>
-          <a:lnRef idx="1">
-            <a:schemeClr val="accent1"/>
-          </a:lnRef>
-          <a:fillRef idx="3">
-            <a:schemeClr val="accent1"/>
-          </a:fillRef>
-          <a:effectRef idx="2">
-            <a:schemeClr val="accent1"/>
-          </a:effectRef>
-          <a:fontRef idx="minor">
-            <a:schemeClr val="lt1"/>
-          </a:fontRef>
-        </p:style>
-        <p:txBody>
-          <a:bodyPr rtlCol="0" anchor="ctr"/>
-          <a:lstStyle/>
-          <a:p>
-            <a:pPr algn="ctr"/>
-          </a:p>
-        </p:txBody>
-      </p:sp>
-      <p:sp>
-        <p:nvSpPr>
-          <p:cNvPr id="6" name="TextBox 5"/>
-          <p:cNvSpPr txBox="1"/>
-          <p:nvPr/>
-        </p:nvSpPr>
-        <p:spPr>
-          <a:xfrm>
-            <a:off x="859536" y="4169663"/>
-            <a:ext cx="10479024" cy="1051560"/>
-          </a:xfrm>
-          <a:prstGeom prst="rect">
-            <a:avLst/>
-          </a:prstGeom>
-          <a:noFill/>
-        </p:spPr>
-        <p:txBody>
-          <a:bodyPr wrap="square">
-            <a:spAutoFit/>
-          </a:bodyPr>
-          <a:lstStyle/>
-          <a:p>
-            <a:pPr>
-              <a:spcAft>
-                <a:spcPts val="700"/>
-              </a:spcAft>
-            </a:pPr>
-            <a:r>
-              <a:rPr sz="2300" b="1" i="0">
-                <a:solidFill>
-                  <a:srgbClr val="006E96"/>
-                </a:solidFill>
-                <a:latin typeface="Arial"/>
-              </a:rPr>
-              <a:t>A portability statement, not worked examples — each sector still needs its own discovery on the ground.</a:t>
-            </a:r>
-          </a:p>
-        </p:txBody>
-      </p:sp>
-      <p:sp>
-        <p:nvSpPr>
-          <p:cNvPr id="7" name="TextBox 6"/>
-          <p:cNvSpPr txBox="1"/>
-          <p:nvPr/>
-        </p:nvSpPr>
-        <p:spPr>
-          <a:xfrm>
-            <a:off x="457200" y="6473952"/>
-            <a:ext cx="7772400" cy="292608"/>
-          </a:xfrm>
-          <a:prstGeom prst="rect">
-            <a:avLst/>
-          </a:prstGeom>
-          <a:noFill/>
-        </p:spPr>
-        <p:txBody>
-          <a:bodyPr wrap="square">
-            <a:spAutoFit/>
-          </a:bodyPr>
-          <a:lstStyle/>
-          <a:p>
-            <a:r>
-              <a:rPr sz="900" b="0" i="0">
-                <a:solidFill>
-                  <a:srgbClr val="595959"/>
-                </a:solidFill>
-                <a:latin typeface="Arial"/>
-              </a:rPr>
-              <a:t>5.3 · Roll it out across sectors — and why the second is cheaper</a:t>
-            </a:r>
-          </a:p>
-        </p:txBody>
-      </p:sp>
-    </p:spTree>
-  </p:cSld>
-  <p:clrMapOvr>
-    <a:masterClrMapping/>
-  </p:clrMapOvr>
-</p:sld>
-</file>
-
 <file path=ppt/slides/slide18.xml><?xml version="1.0" encoding="utf-8"?>
 <p:sld xmlns:a="http://schemas.openxmlformats.org/drawingml/2006/main" xmlns:p="http://schemas.openxmlformats.org/presentationml/2006/main" xmlns:r="http://schemas.openxmlformats.org/officeDocument/2006/relationships">
   <p:cSld>
@@ -12810,58 +11620,14 @@
       <p:grpSpPr/>
       <p:sp>
         <p:nvSpPr>
-          <p:cNvPr id="2" name="Rectangle 1"/>
-          <p:cNvSpPr/>
-          <p:nvPr/>
-        </p:nvSpPr>
-        <p:spPr>
-          <a:xfrm>
-            <a:off x="457200" y="384048"/>
-            <a:ext cx="45720" cy="256032"/>
-          </a:xfrm>
-          <a:prstGeom prst="rect">
-            <a:avLst/>
-          </a:prstGeom>
-          <a:solidFill>
-            <a:srgbClr val="009CD6"/>
-          </a:solidFill>
-          <a:ln>
-            <a:noFill/>
-          </a:ln>
-          <a:effectLst/>
-        </p:spPr>
-        <p:style>
-          <a:lnRef idx="1">
-            <a:schemeClr val="accent1"/>
-          </a:lnRef>
-          <a:fillRef idx="3">
-            <a:schemeClr val="accent1"/>
-          </a:fillRef>
-          <a:effectRef idx="2">
-            <a:schemeClr val="accent1"/>
-          </a:effectRef>
-          <a:fontRef idx="minor">
-            <a:schemeClr val="lt1"/>
-          </a:fontRef>
-        </p:style>
-        <p:txBody>
-          <a:bodyPr rtlCol="0" anchor="ctr"/>
-          <a:lstStyle/>
-          <a:p>
-            <a:pPr algn="ctr"/>
-          </a:p>
-        </p:txBody>
-      </p:sp>
-      <p:sp>
-        <p:nvSpPr>
-          <p:cNvPr id="3" name="TextBox 2"/>
+          <p:cNvPr id="2" name="TextBox 1"/>
           <p:cNvSpPr txBox="1"/>
           <p:nvPr/>
         </p:nvSpPr>
         <p:spPr>
           <a:xfrm>
-            <a:off x="621792" y="274320"/>
-            <a:ext cx="11247120" cy="914400"/>
+            <a:off x="822960" y="822960"/>
+            <a:ext cx="7315200" cy="457200"/>
           </a:xfrm>
           <a:prstGeom prst="rect">
             <a:avLst/>
@@ -12875,237 +11641,95 @@
           <a:lstStyle/>
           <a:p>
             <a:r>
-              <a:rPr sz="2800" b="1" i="0">
+              <a:rPr sz="1200" b="1" i="0">
+                <a:solidFill>
+                  <a:srgbClr val="595959"/>
+                </a:solidFill>
+                <a:latin typeface="Arial"/>
+              </a:rPr>
+              <a:t>KP1 · MODULE 5 · VIDEO 5.3</a:t>
+            </a:r>
+          </a:p>
+        </p:txBody>
+      </p:sp>
+      <p:sp>
+        <p:nvSpPr>
+          <p:cNvPr id="3" name="TextBox 2"/>
+          <p:cNvSpPr txBox="1"/>
+          <p:nvPr/>
+        </p:nvSpPr>
+        <p:spPr>
+          <a:xfrm>
+            <a:off x="822960" y="1828800"/>
+            <a:ext cx="2011680" cy="1097280"/>
+          </a:xfrm>
+          <a:prstGeom prst="rect">
+            <a:avLst/>
+          </a:prstGeom>
+          <a:noFill/>
+        </p:spPr>
+        <p:txBody>
+          <a:bodyPr wrap="square">
+            <a:spAutoFit/>
+          </a:bodyPr>
+          <a:lstStyle/>
+          <a:p>
+            <a:r>
+              <a:rPr sz="6000" b="1" i="0">
+                <a:solidFill>
+                  <a:srgbClr val="009CD6"/>
+                </a:solidFill>
+                <a:latin typeface="Arial"/>
+              </a:rPr>
+              <a:t>5.3</a:t>
+            </a:r>
+          </a:p>
+        </p:txBody>
+      </p:sp>
+      <p:sp>
+        <p:nvSpPr>
+          <p:cNvPr id="4" name="TextBox 3"/>
+          <p:cNvSpPr txBox="1"/>
+          <p:nvPr/>
+        </p:nvSpPr>
+        <p:spPr>
+          <a:xfrm>
+            <a:off x="822960" y="2880360"/>
+            <a:ext cx="9601200" cy="1371600"/>
+          </a:xfrm>
+          <a:prstGeom prst="rect">
+            <a:avLst/>
+          </a:prstGeom>
+          <a:noFill/>
+        </p:spPr>
+        <p:txBody>
+          <a:bodyPr wrap="square">
+            <a:spAutoFit/>
+          </a:bodyPr>
+          <a:lstStyle/>
+          <a:p>
+            <a:r>
+              <a:rPr sz="3400" b="1" i="0">
                 <a:solidFill>
                   <a:srgbClr val="1A1A1A"/>
                 </a:solidFill>
                 <a:latin typeface="Arial"/>
               </a:rPr>
-              <a:t>Wave 1 looks like one sector. It is the foundation the rollout stands on</a:t>
-            </a:r>
-          </a:p>
-        </p:txBody>
-      </p:sp>
-      <p:sp>
-        <p:nvSpPr>
-          <p:cNvPr id="4" name="Rounded Rectangle 3"/>
-          <p:cNvSpPr/>
-          <p:nvPr/>
-        </p:nvSpPr>
-        <p:spPr>
-          <a:xfrm>
-            <a:off x="2651760" y="1737360"/>
-            <a:ext cx="4754880" cy="1463040"/>
-          </a:xfrm>
-          <a:prstGeom prst="roundRect">
-            <a:avLst>
-              <a:gd name="adj" fmla="val 8000"/>
-            </a:avLst>
-          </a:prstGeom>
-          <a:solidFill>
-            <a:srgbClr val="E5F5FB"/>
-          </a:solidFill>
-          <a:ln>
-            <a:noFill/>
-          </a:ln>
-          <a:effectLst/>
-        </p:spPr>
-        <p:style>
-          <a:lnRef idx="1">
-            <a:schemeClr val="accent1"/>
-          </a:lnRef>
-          <a:fillRef idx="3">
-            <a:schemeClr val="accent1"/>
-          </a:fillRef>
-          <a:effectRef idx="2">
-            <a:schemeClr val="accent1"/>
-          </a:effectRef>
-          <a:fontRef idx="minor">
-            <a:schemeClr val="lt1"/>
-          </a:fontRef>
-        </p:style>
-        <p:txBody>
-          <a:bodyPr rtlCol="0" anchor="t" lIns="128016" rIns="128016" tIns="91440" bIns="54864" wrap="square"/>
-          <a:lstStyle/>
-          <a:p>
-            <a:pPr algn="l">
-              <a:spcAft>
-                <a:spcPts val="300"/>
-              </a:spcAft>
-            </a:pPr>
-            <a:r>
-              <a:rPr sz="1500" b="1" i="0">
-                <a:solidFill>
-                  <a:srgbClr val="006E96"/>
-                </a:solidFill>
-                <a:latin typeface="Arial"/>
-              </a:rPr>
-              <a:t>WAVE 1 — ONE SECTOR, THE FULL METHOD, END TO END</a:t>
-            </a:r>
-          </a:p>
-          <a:p>
-            <a:pPr algn="l">
-              <a:spcAft>
-                <a:spcPts val="300"/>
-              </a:spcAft>
-            </a:pPr>
-            <a:r>
-              <a:rPr sz="1300" b="0" i="0">
-                <a:solidFill>
-                  <a:srgbClr val="1A1A1A"/>
-                </a:solidFill>
-                <a:latin typeface="Arial"/>
-              </a:rPr>
-              <a:t>A sector with a clear flagship the minister cares about — the single learner record, the single patient record.</a:t>
-            </a:r>
-          </a:p>
-        </p:txBody>
-      </p:sp>
-      <p:sp>
-        <p:nvSpPr>
-          <p:cNvPr id="5" name="Rounded Rectangle 4"/>
-          <p:cNvSpPr/>
-          <p:nvPr/>
-        </p:nvSpPr>
-        <p:spPr>
-          <a:xfrm>
-            <a:off x="658368" y="3383280"/>
-            <a:ext cx="8732520" cy="1600200"/>
-          </a:xfrm>
-          <a:prstGeom prst="roundRect">
-            <a:avLst>
-              <a:gd name="adj" fmla="val 8000"/>
-            </a:avLst>
-          </a:prstGeom>
-          <a:solidFill>
-            <a:srgbClr val="006E96"/>
-          </a:solidFill>
-          <a:ln>
-            <a:noFill/>
-          </a:ln>
-          <a:effectLst/>
-        </p:spPr>
-        <p:style>
-          <a:lnRef idx="1">
-            <a:schemeClr val="accent1"/>
-          </a:lnRef>
-          <a:fillRef idx="3">
-            <a:schemeClr val="accent1"/>
-          </a:fillRef>
-          <a:effectRef idx="2">
-            <a:schemeClr val="accent1"/>
-          </a:effectRef>
-          <a:fontRef idx="minor">
-            <a:schemeClr val="lt1"/>
-          </a:fontRef>
-        </p:style>
-        <p:txBody>
-          <a:bodyPr rtlCol="0" anchor="t" lIns="128016" rIns="128016" tIns="91440" bIns="54864" wrap="square"/>
-          <a:lstStyle/>
-          <a:p>
-            <a:pPr algn="l">
-              <a:spcAft>
-                <a:spcPts val="300"/>
-              </a:spcAft>
-            </a:pPr>
-            <a:r>
-              <a:rPr sz="1500" b="1" i="0">
-                <a:solidFill>
-                  <a:srgbClr val="FFFFFF"/>
-                </a:solidFill>
-                <a:latin typeface="Arial"/>
-              </a:rPr>
-              <a:t>WHAT WAVE 1 REALLY BUILDS — THE NATIONAL FOUNDATIONS</a:t>
-            </a:r>
-          </a:p>
-          <a:p>
-            <a:pPr algn="l">
-              <a:spcAft>
-                <a:spcPts val="300"/>
-              </a:spcAft>
-            </a:pPr>
-            <a:r>
-              <a:rPr sz="1300" b="0" i="0">
-                <a:solidFill>
-                  <a:srgbClr val="FFFFFF"/>
-                </a:solidFill>
-                <a:latin typeface="Arial"/>
-              </a:rPr>
-              <a:t>The permanent team  ·  the governance board  ·  the first shared platforms: identity, data exchange</a:t>
-            </a:r>
-          </a:p>
-          <a:p>
-            <a:pPr algn="l">
-              <a:spcAft>
-                <a:spcPts val="300"/>
-              </a:spcAft>
-            </a:pPr>
-            <a:r>
-              <a:rPr sz="1300" b="0" i="0">
-                <a:solidFill>
-                  <a:srgbClr val="FFFFFF"/>
-                </a:solidFill>
-                <a:latin typeface="Arial"/>
-              </a:rPr>
-              <a:t>Every later sector stands on this — none of them builds it again.</a:t>
-            </a:r>
-          </a:p>
-        </p:txBody>
-      </p:sp>
-      <p:sp>
-        <p:nvSpPr>
-          <p:cNvPr id="6" name="Rectangle 5"/>
-          <p:cNvSpPr/>
-          <p:nvPr/>
-        </p:nvSpPr>
-        <p:spPr>
-          <a:xfrm>
-            <a:off x="9646920" y="1737360"/>
-            <a:ext cx="45720" cy="3246120"/>
-          </a:xfrm>
-          <a:prstGeom prst="rect">
-            <a:avLst/>
-          </a:prstGeom>
-          <a:solidFill>
-            <a:srgbClr val="009CD6"/>
-          </a:solidFill>
-          <a:ln>
-            <a:noFill/>
-          </a:ln>
-          <a:effectLst/>
-        </p:spPr>
-        <p:style>
-          <a:lnRef idx="1">
-            <a:schemeClr val="accent1"/>
-          </a:lnRef>
-          <a:fillRef idx="3">
-            <a:schemeClr val="accent1"/>
-          </a:fillRef>
-          <a:effectRef idx="2">
-            <a:schemeClr val="accent1"/>
-          </a:effectRef>
-          <a:fontRef idx="minor">
-            <a:schemeClr val="lt1"/>
-          </a:fontRef>
-        </p:style>
-        <p:txBody>
-          <a:bodyPr rtlCol="0" anchor="ctr"/>
-          <a:lstStyle/>
-          <a:p>
-            <a:pPr algn="ctr"/>
-          </a:p>
-        </p:txBody>
-      </p:sp>
-      <p:sp>
-        <p:nvSpPr>
-          <p:cNvPr id="7" name="TextBox 6"/>
+              <a:t>Roll it out across sectors — and why the second is cheaper</a:t>
+            </a:r>
+          </a:p>
+        </p:txBody>
+      </p:sp>
+      <p:sp>
+        <p:nvSpPr>
+          <p:cNvPr id="5" name="TextBox 4"/>
           <p:cNvSpPr txBox="1"/>
           <p:nvPr/>
         </p:nvSpPr>
         <p:spPr>
           <a:xfrm>
-            <a:off x="9829800" y="1737360"/>
-            <a:ext cx="1737360" cy="3246120"/>
+            <a:off x="822960" y="4343400"/>
+            <a:ext cx="9875520" cy="1554480"/>
           </a:xfrm>
           <a:prstGeom prst="rect">
             <a:avLst/>
@@ -13118,103 +11742,48 @@
           </a:bodyPr>
           <a:lstStyle/>
           <a:p>
-            <a:pPr>
-              <a:spcAft>
-                <a:spcPts val="800"/>
-              </a:spcAft>
-            </a:pPr>
-            <a:r>
-              <a:rPr sz="1250" b="0" i="1">
+            <a:r>
+              <a:rPr sz="1700" b="0" i="1">
                 <a:solidFill>
                   <a:srgbClr val="595959"/>
                 </a:solidFill>
                 <a:latin typeface="Arial"/>
               </a:rPr>
-              <a:t>The sector is what the minister sees.</a:t>
-            </a:r>
-          </a:p>
-          <a:p>
-            <a:pPr>
-              <a:spcAft>
-                <a:spcPts val="800"/>
-              </a:spcAft>
-            </a:pPr>
-            <a:r>
-              <a:rPr sz="1250" b="0" i="1">
+              <a:t>The method is sector-agnostic — only the record at the centre changes — so roll it out as a wave roadmap: one sector first to build the shared platforms, then sectors one at a time, each cheaper than the last, governed into a single national architecture.</a:t>
+            </a:r>
+          </a:p>
+        </p:txBody>
+      </p:sp>
+      <p:sp>
+        <p:nvSpPr>
+          <p:cNvPr id="6" name="TextBox 5"/>
+          <p:cNvSpPr txBox="1"/>
+          <p:nvPr/>
+        </p:nvSpPr>
+        <p:spPr>
+          <a:xfrm>
+            <a:off x="822960" y="5989320"/>
+            <a:ext cx="7315200" cy="365760"/>
+          </a:xfrm>
+          <a:prstGeom prst="rect">
+            <a:avLst/>
+          </a:prstGeom>
+          <a:noFill/>
+        </p:spPr>
+        <p:txBody>
+          <a:bodyPr wrap="square">
+            <a:spAutoFit/>
+          </a:bodyPr>
+          <a:lstStyle/>
+          <a:p>
+            <a:r>
+              <a:rPr sz="1200" b="0" i="0">
                 <a:solidFill>
                   <a:srgbClr val="595959"/>
                 </a:solidFill>
                 <a:latin typeface="Arial"/>
               </a:rPr>
-              <a:t>The base is what the country keeps.</a:t>
-            </a:r>
-          </a:p>
-        </p:txBody>
-      </p:sp>
-      <p:sp>
-        <p:nvSpPr>
-          <p:cNvPr id="8" name="TextBox 7"/>
-          <p:cNvSpPr txBox="1"/>
-          <p:nvPr/>
-        </p:nvSpPr>
-        <p:spPr>
-          <a:xfrm>
-            <a:off x="658368" y="5760720"/>
-            <a:ext cx="10881360" cy="548640"/>
-          </a:xfrm>
-          <a:prstGeom prst="rect">
-            <a:avLst/>
-          </a:prstGeom>
-          <a:noFill/>
-        </p:spPr>
-        <p:txBody>
-          <a:bodyPr wrap="square">
-            <a:spAutoFit/>
-          </a:bodyPr>
-          <a:lstStyle/>
-          <a:p>
-            <a:r>
-              <a:rPr sz="1550" b="1" i="0">
-                <a:solidFill>
-                  <a:srgbClr val="006E96"/>
-                </a:solidFill>
-                <a:latin typeface="Arial"/>
-              </a:rPr>
-              <a:t>One sector, done well — and the national foundations, laid.</a:t>
-            </a:r>
-          </a:p>
-        </p:txBody>
-      </p:sp>
-      <p:sp>
-        <p:nvSpPr>
-          <p:cNvPr id="9" name="TextBox 8"/>
-          <p:cNvSpPr txBox="1"/>
-          <p:nvPr/>
-        </p:nvSpPr>
-        <p:spPr>
-          <a:xfrm>
-            <a:off x="457200" y="6473952"/>
-            <a:ext cx="7772400" cy="292608"/>
-          </a:xfrm>
-          <a:prstGeom prst="rect">
-            <a:avLst/>
-          </a:prstGeom>
-          <a:noFill/>
-        </p:spPr>
-        <p:txBody>
-          <a:bodyPr wrap="square">
-            <a:spAutoFit/>
-          </a:bodyPr>
-          <a:lstStyle/>
-          <a:p>
-            <a:r>
-              <a:rPr sz="900" b="0" i="0">
-                <a:solidFill>
-                  <a:srgbClr val="595959"/>
-                </a:solidFill>
-                <a:latin typeface="Arial"/>
-              </a:rPr>
-              <a:t>5.3 · Roll it out across sectors — and why the second is cheaper</a:t>
+              <a:t>~5 minutes · standalone video · voice-over on text slides</a:t>
             </a:r>
           </a:p>
         </p:txBody>
@@ -13239,58 +11808,14 @@
       <p:grpSpPr/>
       <p:sp>
         <p:nvSpPr>
-          <p:cNvPr id="2" name="Rectangle 1"/>
-          <p:cNvSpPr/>
-          <p:nvPr/>
-        </p:nvSpPr>
-        <p:spPr>
-          <a:xfrm>
-            <a:off x="457200" y="384048"/>
-            <a:ext cx="45720" cy="256032"/>
-          </a:xfrm>
-          <a:prstGeom prst="rect">
-            <a:avLst/>
-          </a:prstGeom>
-          <a:solidFill>
-            <a:srgbClr val="009CD6"/>
-          </a:solidFill>
-          <a:ln>
-            <a:noFill/>
-          </a:ln>
-          <a:effectLst/>
-        </p:spPr>
-        <p:style>
-          <a:lnRef idx="1">
-            <a:schemeClr val="accent1"/>
-          </a:lnRef>
-          <a:fillRef idx="3">
-            <a:schemeClr val="accent1"/>
-          </a:fillRef>
-          <a:effectRef idx="2">
-            <a:schemeClr val="accent1"/>
-          </a:effectRef>
-          <a:fontRef idx="minor">
-            <a:schemeClr val="lt1"/>
-          </a:fontRef>
-        </p:style>
-        <p:txBody>
-          <a:bodyPr rtlCol="0" anchor="ctr"/>
-          <a:lstStyle/>
-          <a:p>
-            <a:pPr algn="ctr"/>
-          </a:p>
-        </p:txBody>
-      </p:sp>
-      <p:sp>
-        <p:nvSpPr>
-          <p:cNvPr id="3" name="TextBox 2"/>
+          <p:cNvPr id="2" name="TextBox 1"/>
           <p:cNvSpPr txBox="1"/>
           <p:nvPr/>
         </p:nvSpPr>
         <p:spPr>
           <a:xfrm>
-            <a:off x="621792" y="274320"/>
-            <a:ext cx="11247120" cy="914400"/>
+            <a:off x="1005840" y="1325880"/>
+            <a:ext cx="5486400" cy="365760"/>
           </a:xfrm>
           <a:prstGeom prst="rect">
             <a:avLst/>
@@ -13304,714 +11829,61 @@
           <a:lstStyle/>
           <a:p>
             <a:r>
-              <a:rPr sz="2800" b="1" i="0">
+              <a:rPr sz="1200" b="1" i="0">
+                <a:solidFill>
+                  <a:srgbClr val="006E96"/>
+                </a:solidFill>
+                <a:latin typeface="Arial"/>
+              </a:rPr>
+              <a:t>WHERE WE START</a:t>
+            </a:r>
+          </a:p>
+        </p:txBody>
+      </p:sp>
+      <p:sp>
+        <p:nvSpPr>
+          <p:cNvPr id="3" name="TextBox 2"/>
+          <p:cNvSpPr txBox="1"/>
+          <p:nvPr/>
+        </p:nvSpPr>
+        <p:spPr>
+          <a:xfrm>
+            <a:off x="1005840" y="1783080"/>
+            <a:ext cx="10149840" cy="1737360"/>
+          </a:xfrm>
+          <a:prstGeom prst="rect">
+            <a:avLst/>
+          </a:prstGeom>
+          <a:noFill/>
+        </p:spPr>
+        <p:txBody>
+          <a:bodyPr wrap="square">
+            <a:spAutoFit/>
+          </a:bodyPr>
+          <a:lstStyle/>
+          <a:p>
+            <a:r>
+              <a:rPr sz="3000" b="1" i="0">
                 <a:solidFill>
                   <a:srgbClr val="1A1A1A"/>
                 </a:solidFill>
                 <a:latin typeface="Arial"/>
               </a:rPr>
-              <a:t>From Wave 2 each sector is cheaper — if the same board governs the pipeline</a:t>
-            </a:r>
-          </a:p>
-        </p:txBody>
-      </p:sp>
-      <p:sp>
-        <p:nvSpPr>
-          <p:cNvPr id="4" name="Rounded Rectangle 3"/>
-          <p:cNvSpPr/>
-          <p:nvPr/>
-        </p:nvSpPr>
-        <p:spPr>
-          <a:xfrm>
-            <a:off x="658368" y="1554480"/>
-            <a:ext cx="10881360" cy="457200"/>
-          </a:xfrm>
-          <a:prstGeom prst="roundRect">
-            <a:avLst>
-              <a:gd name="adj" fmla="val 30000"/>
-            </a:avLst>
-          </a:prstGeom>
-          <a:solidFill>
-            <a:srgbClr val="006E96"/>
-          </a:solidFill>
-          <a:ln>
-            <a:noFill/>
-          </a:ln>
-          <a:effectLst/>
-        </p:spPr>
-        <p:style>
-          <a:lnRef idx="1">
-            <a:schemeClr val="accent1"/>
-          </a:lnRef>
-          <a:fillRef idx="3">
-            <a:schemeClr val="accent1"/>
-          </a:fillRef>
-          <a:effectRef idx="2">
-            <a:schemeClr val="accent1"/>
-          </a:effectRef>
-          <a:fontRef idx="minor">
-            <a:schemeClr val="lt1"/>
-          </a:fontRef>
-        </p:style>
-        <p:txBody>
-          <a:bodyPr rtlCol="0" anchor="ctr" wrap="square"/>
-          <a:lstStyle/>
-          <a:p>
-            <a:pPr algn="ctr"/>
-            <a:r>
-              <a:rPr sz="1200" b="1" i="0">
-                <a:solidFill>
-                  <a:srgbClr val="FFFFFF"/>
-                </a:solidFill>
-                <a:latin typeface="Arial"/>
-              </a:rPr>
-              <a:t>THE SAME BOARD GOVERNS THE NATIONAL PIPELINE — which sector next, what each must reuse, where an exception is warranted</a:t>
-            </a:r>
-          </a:p>
-        </p:txBody>
-      </p:sp>
-      <p:sp>
-        <p:nvSpPr>
-          <p:cNvPr id="5" name="Rounded Rectangle 4"/>
-          <p:cNvSpPr/>
-          <p:nvPr/>
-        </p:nvSpPr>
-        <p:spPr>
-          <a:xfrm>
-            <a:off x="658368" y="2285999"/>
-            <a:ext cx="3574222" cy="2606040"/>
-          </a:xfrm>
-          <a:prstGeom prst="roundRect">
-            <a:avLst>
-              <a:gd name="adj" fmla="val 8000"/>
-            </a:avLst>
-          </a:prstGeom>
-          <a:solidFill>
-            <a:srgbClr val="009CD6"/>
-          </a:solidFill>
-          <a:ln>
-            <a:noFill/>
-          </a:ln>
-          <a:effectLst/>
-        </p:spPr>
-        <p:style>
-          <a:lnRef idx="1">
-            <a:schemeClr val="accent1"/>
-          </a:lnRef>
-          <a:fillRef idx="3">
-            <a:schemeClr val="accent1"/>
-          </a:fillRef>
-          <a:effectRef idx="2">
-            <a:schemeClr val="accent1"/>
-          </a:effectRef>
-          <a:fontRef idx="minor">
-            <a:schemeClr val="lt1"/>
-          </a:fontRef>
-        </p:style>
-        <p:txBody>
-          <a:bodyPr rtlCol="0" anchor="t" lIns="128016" rIns="128016" tIns="91440" bIns="54864" wrap="square"/>
-          <a:lstStyle/>
-          <a:p>
-            <a:pPr algn="l">
-              <a:spcAft>
-                <a:spcPts val="300"/>
-              </a:spcAft>
-            </a:pPr>
-            <a:r>
-              <a:rPr sz="1300" b="1" i="0">
-                <a:solidFill>
-                  <a:srgbClr val="FFFFFF"/>
-                </a:solidFill>
-                <a:latin typeface="Arial"/>
-              </a:rPr>
-              <a:t>WAVE 1 — the foundation sector</a:t>
-            </a:r>
-          </a:p>
-          <a:p>
-            <a:pPr algn="l">
-              <a:spcAft>
-                <a:spcPts val="300"/>
-              </a:spcAft>
-            </a:pPr>
-            <a:r>
-              <a:rPr sz="1150" b="0" i="0">
-                <a:solidFill>
-                  <a:srgbClr val="FFFFFF"/>
-                </a:solidFill>
-                <a:latin typeface="Arial"/>
-              </a:rPr>
-              <a:t>Full method, end to end</a:t>
-            </a:r>
-          </a:p>
-          <a:p>
-            <a:pPr algn="l">
-              <a:spcAft>
-                <a:spcPts val="300"/>
-              </a:spcAft>
-            </a:pPr>
-            <a:r>
-              <a:rPr sz="1150" b="0" i="0">
-                <a:solidFill>
-                  <a:srgbClr val="FFFFFF"/>
-                </a:solidFill>
-                <a:latin typeface="Arial"/>
-              </a:rPr>
-              <a:t>Builds the team, the board, identity, data exchange</a:t>
-            </a:r>
-          </a:p>
-        </p:txBody>
-      </p:sp>
-      <p:sp>
-        <p:nvSpPr>
-          <p:cNvPr id="6" name="Rounded Rectangle 5"/>
-          <p:cNvSpPr/>
-          <p:nvPr/>
-        </p:nvSpPr>
-        <p:spPr>
-          <a:xfrm>
-            <a:off x="4397182" y="2859328"/>
-            <a:ext cx="2792361" cy="2032711"/>
-          </a:xfrm>
-          <a:prstGeom prst="roundRect">
-            <a:avLst>
-              <a:gd name="adj" fmla="val 8000"/>
-            </a:avLst>
-          </a:prstGeom>
-          <a:solidFill>
-            <a:srgbClr val="E5F5FB"/>
-          </a:solidFill>
-          <a:ln>
-            <a:noFill/>
-          </a:ln>
-          <a:effectLst/>
-        </p:spPr>
-        <p:style>
-          <a:lnRef idx="1">
-            <a:schemeClr val="accent1"/>
-          </a:lnRef>
-          <a:fillRef idx="3">
-            <a:schemeClr val="accent1"/>
-          </a:fillRef>
-          <a:effectRef idx="2">
-            <a:schemeClr val="accent1"/>
-          </a:effectRef>
-          <a:fontRef idx="minor">
-            <a:schemeClr val="lt1"/>
-          </a:fontRef>
-        </p:style>
-        <p:txBody>
-          <a:bodyPr rtlCol="0" anchor="t" lIns="128016" rIns="128016" tIns="91440" bIns="54864" wrap="square"/>
-          <a:lstStyle/>
-          <a:p>
-            <a:pPr algn="l">
-              <a:spcAft>
-                <a:spcPts val="300"/>
-              </a:spcAft>
-            </a:pPr>
-            <a:r>
-              <a:rPr sz="1300" b="1" i="0">
-                <a:solidFill>
-                  <a:srgbClr val="006E96"/>
-                </a:solidFill>
-                <a:latin typeface="Arial"/>
-              </a:rPr>
-              <a:t>WAVE 2 — health</a:t>
-            </a:r>
-          </a:p>
-          <a:p>
-            <a:pPr algn="l">
-              <a:spcAft>
-                <a:spcPts val="300"/>
-              </a:spcAft>
-            </a:pPr>
-            <a:r>
-              <a:rPr sz="1150" b="0" i="0">
-                <a:solidFill>
-                  <a:srgbClr val="1A1A1A"/>
-                </a:solidFill>
-                <a:latin typeface="Arial"/>
-              </a:rPr>
-              <a:t>Consumes the platforms</a:t>
-            </a:r>
-          </a:p>
-          <a:p>
-            <a:pPr algn="l">
-              <a:spcAft>
-                <a:spcPts val="300"/>
-              </a:spcAft>
-            </a:pPr>
-            <a:r>
-              <a:rPr sz="1150" b="0" i="0">
-                <a:solidFill>
-                  <a:srgbClr val="1A1A1A"/>
-                </a:solidFill>
-                <a:latin typeface="Arial"/>
-              </a:rPr>
-              <a:t>Lighter method — team, framework and governance in place</a:t>
-            </a:r>
-          </a:p>
-        </p:txBody>
-      </p:sp>
-      <p:cxnSp>
-        <p:nvCxnSpPr>
-          <p:cNvPr id="7" name="Connector 6"/>
-          <p:cNvCxnSpPr/>
-          <p:nvPr/>
-        </p:nvCxnSpPr>
-        <p:spPr>
-          <a:xfrm>
-            <a:off x="4250878" y="4480559"/>
-            <a:ext cx="128016" cy="0"/>
-          </a:xfrm>
-          <a:prstGeom prst="line">
-            <a:avLst/>
-          </a:prstGeom>
-          <a:ln w="25400">
-            <a:solidFill>
-              <a:srgbClr val="006E96"/>
-            </a:solidFill>
-            <a:tailEnd type="triangle" w="med" len="med"/>
-          </a:ln>
-        </p:spPr>
-        <p:style>
-          <a:lnRef idx="2">
-            <a:schemeClr val="accent1"/>
-          </a:lnRef>
-          <a:fillRef idx="0">
-            <a:schemeClr val="accent1"/>
-          </a:fillRef>
-          <a:effectRef idx="1">
-            <a:schemeClr val="accent1"/>
-          </a:effectRef>
-          <a:fontRef idx="minor">
-            <a:schemeClr val="tx1"/>
-          </a:fontRef>
-        </p:style>
-      </p:cxnSp>
-      <p:sp>
-        <p:nvSpPr>
-          <p:cNvPr id="8" name="Rounded Rectangle 7"/>
-          <p:cNvSpPr/>
-          <p:nvPr/>
-        </p:nvSpPr>
-        <p:spPr>
-          <a:xfrm>
-            <a:off x="7354135" y="3276295"/>
-            <a:ext cx="2233889" cy="1615744"/>
-          </a:xfrm>
-          <a:prstGeom prst="roundRect">
-            <a:avLst>
-              <a:gd name="adj" fmla="val 8000"/>
-            </a:avLst>
-          </a:prstGeom>
-          <a:solidFill>
-            <a:srgbClr val="E5F5FB"/>
-          </a:solidFill>
-          <a:ln>
-            <a:noFill/>
-          </a:ln>
-          <a:effectLst/>
-        </p:spPr>
-        <p:style>
-          <a:lnRef idx="1">
-            <a:schemeClr val="accent1"/>
-          </a:lnRef>
-          <a:fillRef idx="3">
-            <a:schemeClr val="accent1"/>
-          </a:fillRef>
-          <a:effectRef idx="2">
-            <a:schemeClr val="accent1"/>
-          </a:effectRef>
-          <a:fontRef idx="minor">
-            <a:schemeClr val="lt1"/>
-          </a:fontRef>
-        </p:style>
-        <p:txBody>
-          <a:bodyPr rtlCol="0" anchor="t" lIns="128016" rIns="128016" tIns="91440" bIns="54864" wrap="square"/>
-          <a:lstStyle/>
-          <a:p>
-            <a:pPr algn="l">
-              <a:spcAft>
-                <a:spcPts val="300"/>
-              </a:spcAft>
-            </a:pPr>
-            <a:r>
-              <a:rPr sz="1300" b="1" i="0">
-                <a:solidFill>
-                  <a:srgbClr val="006E96"/>
-                </a:solidFill>
-                <a:latin typeface="Arial"/>
-              </a:rPr>
-              <a:t>WAVE 3 — agriculture</a:t>
-            </a:r>
-          </a:p>
-          <a:p>
-            <a:pPr algn="l">
-              <a:spcAft>
-                <a:spcPts val="300"/>
-              </a:spcAft>
-            </a:pPr>
-            <a:r>
-              <a:rPr sz="1150" b="0" i="0">
-                <a:solidFill>
-                  <a:srgbClr val="1A1A1A"/>
-                </a:solidFill>
-                <a:latin typeface="Arial"/>
-              </a:rPr>
-              <a:t>Consumes more</a:t>
-            </a:r>
-          </a:p>
-          <a:p>
-            <a:pPr algn="l">
-              <a:spcAft>
-                <a:spcPts val="300"/>
-              </a:spcAft>
-            </a:pPr>
-            <a:r>
-              <a:rPr sz="1150" b="0" i="0">
-                <a:solidFill>
-                  <a:srgbClr val="1A1A1A"/>
-                </a:solidFill>
-                <a:latin typeface="Arial"/>
-              </a:rPr>
-              <a:t>Faster, for less</a:t>
-            </a:r>
-          </a:p>
-        </p:txBody>
-      </p:sp>
-      <p:cxnSp>
-        <p:nvCxnSpPr>
-          <p:cNvPr id="9" name="Connector 8"/>
-          <p:cNvCxnSpPr/>
-          <p:nvPr/>
-        </p:nvCxnSpPr>
-        <p:spPr>
-          <a:xfrm>
-            <a:off x="7207831" y="4480559"/>
-            <a:ext cx="128016" cy="0"/>
-          </a:xfrm>
-          <a:prstGeom prst="line">
-            <a:avLst/>
-          </a:prstGeom>
-          <a:ln w="25400">
-            <a:solidFill>
-              <a:srgbClr val="006E96"/>
-            </a:solidFill>
-            <a:tailEnd type="triangle" w="med" len="med"/>
-          </a:ln>
-        </p:spPr>
-        <p:style>
-          <a:lnRef idx="2">
-            <a:schemeClr val="accent1"/>
-          </a:lnRef>
-          <a:fillRef idx="0">
-            <a:schemeClr val="accent1"/>
-          </a:fillRef>
-          <a:effectRef idx="1">
-            <a:schemeClr val="accent1"/>
-          </a:effectRef>
-          <a:fontRef idx="minor">
-            <a:schemeClr val="tx1"/>
-          </a:fontRef>
-        </p:style>
-      </p:cxnSp>
-      <p:sp>
-        <p:nvSpPr>
-          <p:cNvPr id="10" name="Rounded Rectangle 9"/>
-          <p:cNvSpPr/>
-          <p:nvPr/>
-        </p:nvSpPr>
-        <p:spPr>
-          <a:xfrm>
-            <a:off x="9752616" y="3589020"/>
-            <a:ext cx="1787111" cy="1303020"/>
-          </a:xfrm>
-          <a:prstGeom prst="roundRect">
-            <a:avLst>
-              <a:gd name="adj" fmla="val 8000"/>
-            </a:avLst>
-          </a:prstGeom>
-          <a:solidFill>
-            <a:srgbClr val="E5F5FB"/>
-          </a:solidFill>
-          <a:ln>
-            <a:noFill/>
-          </a:ln>
-          <a:effectLst/>
-        </p:spPr>
-        <p:style>
-          <a:lnRef idx="1">
-            <a:schemeClr val="accent1"/>
-          </a:lnRef>
-          <a:fillRef idx="3">
-            <a:schemeClr val="accent1"/>
-          </a:fillRef>
-          <a:effectRef idx="2">
-            <a:schemeClr val="accent1"/>
-          </a:effectRef>
-          <a:fontRef idx="minor">
-            <a:schemeClr val="lt1"/>
-          </a:fontRef>
-        </p:style>
-        <p:txBody>
-          <a:bodyPr rtlCol="0" anchor="t" lIns="128016" rIns="128016" tIns="91440" bIns="54864" wrap="square"/>
-          <a:lstStyle/>
-          <a:p>
-            <a:pPr algn="l">
-              <a:spcAft>
-                <a:spcPts val="300"/>
-              </a:spcAft>
-            </a:pPr>
-            <a:r>
-              <a:rPr sz="1300" b="1" i="0">
-                <a:solidFill>
-                  <a:srgbClr val="006E96"/>
-                </a:solidFill>
-                <a:latin typeface="Arial"/>
-              </a:rPr>
-              <a:t>WAVE 4 — social protection</a:t>
-            </a:r>
-          </a:p>
-          <a:p>
-            <a:pPr algn="l">
-              <a:spcAft>
-                <a:spcPts val="300"/>
-              </a:spcAft>
-            </a:pPr>
-            <a:r>
-              <a:rPr sz="1150" b="0" i="0">
-                <a:solidFill>
-                  <a:srgbClr val="1A1A1A"/>
-                </a:solidFill>
-                <a:latin typeface="Arial"/>
-              </a:rPr>
-              <a:t>Easier still</a:t>
-            </a:r>
-          </a:p>
-        </p:txBody>
-      </p:sp>
-      <p:cxnSp>
-        <p:nvCxnSpPr>
-          <p:cNvPr id="11" name="Connector 10"/>
-          <p:cNvCxnSpPr/>
-          <p:nvPr/>
-        </p:nvCxnSpPr>
-        <p:spPr>
-          <a:xfrm>
-            <a:off x="9606312" y="4480559"/>
-            <a:ext cx="128016" cy="0"/>
-          </a:xfrm>
-          <a:prstGeom prst="line">
-            <a:avLst/>
-          </a:prstGeom>
-          <a:ln w="25400">
-            <a:solidFill>
-              <a:srgbClr val="006E96"/>
-            </a:solidFill>
-            <a:tailEnd type="triangle" w="med" len="med"/>
-          </a:ln>
-        </p:spPr>
-        <p:style>
-          <a:lnRef idx="2">
-            <a:schemeClr val="accent1"/>
-          </a:lnRef>
-          <a:fillRef idx="0">
-            <a:schemeClr val="accent1"/>
-          </a:fillRef>
-          <a:effectRef idx="1">
-            <a:schemeClr val="accent1"/>
-          </a:effectRef>
-          <a:fontRef idx="minor">
-            <a:schemeClr val="tx1"/>
-          </a:fontRef>
-        </p:style>
-      </p:cxnSp>
-      <p:sp>
-        <p:nvSpPr>
-          <p:cNvPr id="12" name="Rectangle 11"/>
-          <p:cNvSpPr/>
-          <p:nvPr/>
-        </p:nvSpPr>
-        <p:spPr>
-          <a:xfrm>
-            <a:off x="658368" y="5248656"/>
-            <a:ext cx="3738814" cy="182880"/>
-          </a:xfrm>
-          <a:prstGeom prst="rect">
-            <a:avLst/>
-          </a:prstGeom>
-          <a:solidFill>
-            <a:srgbClr val="006E96"/>
-          </a:solidFill>
-          <a:ln>
-            <a:noFill/>
-          </a:ln>
-          <a:effectLst/>
-        </p:spPr>
-        <p:style>
-          <a:lnRef idx="1">
-            <a:schemeClr val="accent1"/>
-          </a:lnRef>
-          <a:fillRef idx="3">
-            <a:schemeClr val="accent1"/>
-          </a:fillRef>
-          <a:effectRef idx="2">
-            <a:schemeClr val="accent1"/>
-          </a:effectRef>
-          <a:fontRef idx="minor">
-            <a:schemeClr val="lt1"/>
-          </a:fontRef>
-        </p:style>
-        <p:txBody>
-          <a:bodyPr rtlCol="0" anchor="ctr"/>
-          <a:lstStyle/>
-          <a:p>
-            <a:pPr algn="ctr"/>
-          </a:p>
-        </p:txBody>
-      </p:sp>
-      <p:sp>
-        <p:nvSpPr>
-          <p:cNvPr id="13" name="Rectangle 12"/>
-          <p:cNvSpPr/>
-          <p:nvPr/>
-        </p:nvSpPr>
-        <p:spPr>
-          <a:xfrm>
-            <a:off x="4397182" y="5175504"/>
-            <a:ext cx="2956953" cy="256032"/>
-          </a:xfrm>
-          <a:prstGeom prst="rect">
-            <a:avLst/>
-          </a:prstGeom>
-          <a:solidFill>
-            <a:srgbClr val="009CD6"/>
-          </a:solidFill>
-          <a:ln>
-            <a:noFill/>
-          </a:ln>
-          <a:effectLst/>
-        </p:spPr>
-        <p:style>
-          <a:lnRef idx="1">
-            <a:schemeClr val="accent1"/>
-          </a:lnRef>
-          <a:fillRef idx="3">
-            <a:schemeClr val="accent1"/>
-          </a:fillRef>
-          <a:effectRef idx="2">
-            <a:schemeClr val="accent1"/>
-          </a:effectRef>
-          <a:fontRef idx="minor">
-            <a:schemeClr val="lt1"/>
-          </a:fontRef>
-        </p:style>
-        <p:txBody>
-          <a:bodyPr rtlCol="0" anchor="ctr"/>
-          <a:lstStyle/>
-          <a:p>
-            <a:pPr algn="ctr"/>
-          </a:p>
-        </p:txBody>
-      </p:sp>
-      <p:sp>
-        <p:nvSpPr>
-          <p:cNvPr id="14" name="Rectangle 13"/>
-          <p:cNvSpPr/>
-          <p:nvPr/>
-        </p:nvSpPr>
-        <p:spPr>
-          <a:xfrm>
-            <a:off x="7354135" y="5102352"/>
-            <a:ext cx="2398481" cy="329184"/>
-          </a:xfrm>
-          <a:prstGeom prst="rect">
-            <a:avLst/>
-          </a:prstGeom>
-          <a:solidFill>
-            <a:srgbClr val="009CD6"/>
-          </a:solidFill>
-          <a:ln>
-            <a:noFill/>
-          </a:ln>
-          <a:effectLst/>
-        </p:spPr>
-        <p:style>
-          <a:lnRef idx="1">
-            <a:schemeClr val="accent1"/>
-          </a:lnRef>
-          <a:fillRef idx="3">
-            <a:schemeClr val="accent1"/>
-          </a:fillRef>
-          <a:effectRef idx="2">
-            <a:schemeClr val="accent1"/>
-          </a:effectRef>
-          <a:fontRef idx="minor">
-            <a:schemeClr val="lt1"/>
-          </a:fontRef>
-        </p:style>
-        <p:txBody>
-          <a:bodyPr rtlCol="0" anchor="ctr"/>
-          <a:lstStyle/>
-          <a:p>
-            <a:pPr algn="ctr"/>
-          </a:p>
-        </p:txBody>
-      </p:sp>
-      <p:sp>
-        <p:nvSpPr>
-          <p:cNvPr id="15" name="Rectangle 14"/>
-          <p:cNvSpPr/>
-          <p:nvPr/>
-        </p:nvSpPr>
-        <p:spPr>
-          <a:xfrm>
-            <a:off x="9752616" y="5029200"/>
-            <a:ext cx="1787111" cy="402336"/>
-          </a:xfrm>
-          <a:prstGeom prst="rect">
-            <a:avLst/>
-          </a:prstGeom>
-          <a:solidFill>
-            <a:srgbClr val="009CD6"/>
-          </a:solidFill>
-          <a:ln>
-            <a:noFill/>
-          </a:ln>
-          <a:effectLst/>
-        </p:spPr>
-        <p:style>
-          <a:lnRef idx="1">
-            <a:schemeClr val="accent1"/>
-          </a:lnRef>
-          <a:fillRef idx="3">
-            <a:schemeClr val="accent1"/>
-          </a:fillRef>
-          <a:effectRef idx="2">
-            <a:schemeClr val="accent1"/>
-          </a:effectRef>
-          <a:fontRef idx="minor">
-            <a:schemeClr val="lt1"/>
-          </a:fontRef>
-        </p:style>
-        <p:txBody>
-          <a:bodyPr rtlCol="0" anchor="ctr"/>
-          <a:lstStyle/>
-          <a:p>
-            <a:pPr algn="ctr"/>
-          </a:p>
-        </p:txBody>
-      </p:sp>
-      <p:sp>
-        <p:nvSpPr>
-          <p:cNvPr id="16" name="TextBox 15"/>
+              <a:t>Beyond one sector: does the method travel, and how do you roll it out?</a:t>
+            </a:r>
+          </a:p>
+        </p:txBody>
+      </p:sp>
+      <p:sp>
+        <p:nvSpPr>
+          <p:cNvPr id="4" name="TextBox 3"/>
           <p:cNvSpPr txBox="1"/>
           <p:nvPr/>
         </p:nvSpPr>
         <p:spPr>
           <a:xfrm>
-            <a:off x="658368" y="5486400"/>
-            <a:ext cx="10881360" cy="320040"/>
+            <a:off x="1005840" y="3611880"/>
+            <a:ext cx="10149840" cy="2377440"/>
           </a:xfrm>
           <a:prstGeom prst="rect">
             <a:avLst/>
@@ -14024,55 +11896,42 @@
           </a:bodyPr>
           <a:lstStyle/>
           <a:p>
-            <a:r>
-              <a:rPr sz="1150" b="1" i="0">
+            <a:pPr>
+              <a:spcAft>
+                <a:spcPts val="800"/>
+              </a:spcAft>
+            </a:pPr>
+            <a:r>
+              <a:rPr sz="1700" b="0" i="0">
                 <a:solidFill>
-                  <a:srgbClr val="006E96"/>
+                  <a:srgbClr val="595959"/>
                 </a:solidFill>
                 <a:latin typeface="Arial"/>
               </a:rPr>
-              <a:t>Shared platforms — more complete with every wave</a:t>
-            </a:r>
-          </a:p>
-        </p:txBody>
-      </p:sp>
-      <p:sp>
-        <p:nvSpPr>
-          <p:cNvPr id="17" name="TextBox 16"/>
-          <p:cNvSpPr txBox="1"/>
-          <p:nvPr/>
-        </p:nvSpPr>
-        <p:spPr>
-          <a:xfrm>
-            <a:off x="658368" y="5806440"/>
-            <a:ext cx="10881360" cy="548640"/>
-          </a:xfrm>
-          <a:prstGeom prst="rect">
-            <a:avLst/>
-          </a:prstGeom>
-          <a:noFill/>
-        </p:spPr>
-        <p:txBody>
-          <a:bodyPr wrap="square">
-            <a:spAutoFit/>
-          </a:bodyPr>
-          <a:lstStyle/>
-          <a:p>
-            <a:r>
-              <a:rPr sz="1550" b="1" i="0">
+              <a:t>Two questions, and the answers are linked.</a:t>
+            </a:r>
+          </a:p>
+          <a:p>
+            <a:pPr>
+              <a:spcAft>
+                <a:spcPts val="800"/>
+              </a:spcAft>
+            </a:pPr>
+            <a:r>
+              <a:rPr sz="1700" b="0" i="0">
                 <a:solidFill>
-                  <a:srgbClr val="006E96"/>
+                  <a:srgbClr val="595959"/>
                 </a:solidFill>
                 <a:latin typeface="Arial"/>
               </a:rPr>
-              <a:t>Launched and left, a rollout drifts back into fragmentation. Governed, it compounds.</a:t>
-            </a:r>
-          </a:p>
-        </p:txBody>
-      </p:sp>
-      <p:sp>
-        <p:nvSpPr>
-          <p:cNvPr id="18" name="TextBox 17"/>
+              <a:t>The second sector is cheaper than the first.</a:t>
+            </a:r>
+          </a:p>
+        </p:txBody>
+      </p:sp>
+      <p:sp>
+        <p:nvSpPr>
+          <p:cNvPr id="5" name="TextBox 4"/>
           <p:cNvSpPr txBox="1"/>
           <p:nvPr/>
         </p:nvSpPr>
@@ -14100,6 +11959,41 @@
                 <a:latin typeface="Arial"/>
               </a:rPr>
               <a:t>5.3 · Roll it out across sectors — and why the second is cheaper</a:t>
+            </a:r>
+          </a:p>
+        </p:txBody>
+      </p:sp>
+      <p:sp>
+        <p:nvSpPr>
+          <p:cNvPr id="6" name="TextBox 5"/>
+          <p:cNvSpPr txBox="1"/>
+          <p:nvPr/>
+        </p:nvSpPr>
+        <p:spPr>
+          <a:xfrm>
+            <a:off x="10058400" y="6473952"/>
+            <a:ext cx="1673352" cy="292608"/>
+          </a:xfrm>
+          <a:prstGeom prst="rect">
+            <a:avLst/>
+          </a:prstGeom>
+          <a:noFill/>
+        </p:spPr>
+        <p:txBody>
+          <a:bodyPr wrap="square">
+            <a:spAutoFit/>
+          </a:bodyPr>
+          <a:lstStyle/>
+          <a:p>
+            <a:pPr algn="r"/>
+            <a:r>
+              <a:rPr sz="900" b="0" i="0">
+                <a:solidFill>
+                  <a:srgbClr val="595959"/>
+                </a:solidFill>
+                <a:latin typeface="Arial"/>
+              </a:rPr>
+              <a:t>www.itu.int</a:t>
             </a:r>
           </a:p>
         </p:txBody>
@@ -14195,7 +12089,7 @@
                 </a:solidFill>
                 <a:latin typeface="Arial"/>
               </a:rPr>
-              <a:t>One page, every quarter — the national scorecard</a:t>
+              <a:t>Most of the method does not change — only the record at the centre does</a:t>
             </a:r>
           </a:p>
         </p:txBody>
@@ -14208,8 +12102,8 @@
         </p:nvSpPr>
         <p:spPr>
           <a:xfrm>
-            <a:off x="658368" y="1463040"/>
-            <a:ext cx="10984687" cy="1386839"/>
+            <a:off x="658368" y="1600200"/>
+            <a:ext cx="10881360" cy="2194560"/>
           </a:xfrm>
           <a:prstGeom prst="rect">
             <a:avLst/>
@@ -14224,53 +12118,55 @@
           <a:p>
             <a:pPr>
               <a:spcAft>
-                <a:spcPts val="300"/>
+                <a:spcPts val="1200"/>
               </a:spcAft>
             </a:pPr>
             <a:r>
-              <a:rPr sz="1900" b="1" i="0">
+              <a:rPr sz="2000" b="0" i="0">
                 <a:solidFill>
                   <a:srgbClr val="1A1A1A"/>
                 </a:solidFill>
                 <a:latin typeface="Arial"/>
               </a:rPr>
-              <a:t>Sectors live</a:t>
+              <a:t>The five phases, the four sign-offs, the six deliverables, reuse-before-build, the binding board — none of it is sector-specific.</a:t>
             </a:r>
           </a:p>
           <a:p>
             <a:pPr>
               <a:spcAft>
-                <a:spcPts val="300"/>
+                <a:spcPts val="1200"/>
               </a:spcAft>
             </a:pPr>
             <a:r>
-              <a:rPr sz="1550" b="0" i="0">
+              <a:rPr sz="2000" b="0" i="0">
                 <a:solidFill>
-                  <a:srgbClr val="595959"/>
+                  <a:srgbClr val="1A1A1A"/>
                 </a:solidFill>
                 <a:latin typeface="Arial"/>
               </a:rPr>
-              <a:t>How many have run the method end to end.</a:t>
-            </a:r>
-          </a:p>
-        </p:txBody>
-      </p:sp>
-      <p:sp>
-        <p:nvSpPr>
-          <p:cNvPr id="5" name="Rectangle 4"/>
+              <a:t>Only the record at the centre changes: a learner, a patient, a farmer, a beneficiary. Different domain, identical shape — registered several times, re-entered on paper, blocking a flagship the minister has promised.</a:t>
+            </a:r>
+          </a:p>
+        </p:txBody>
+      </p:sp>
+      <p:sp>
+        <p:nvSpPr>
+          <p:cNvPr id="5" name="Rounded Rectangle 4"/>
           <p:cNvSpPr/>
           <p:nvPr/>
         </p:nvSpPr>
         <p:spPr>
           <a:xfrm>
-            <a:off x="621792" y="2854452"/>
-            <a:ext cx="10881360" cy="12700"/>
-          </a:xfrm>
-          <a:prstGeom prst="rect">
-            <a:avLst/>
+            <a:off x="658368" y="3977639"/>
+            <a:ext cx="10881360" cy="1325880"/>
+          </a:xfrm>
+          <a:prstGeom prst="roundRect">
+            <a:avLst>
+              <a:gd name="adj" fmla="val 4500"/>
+            </a:avLst>
           </a:prstGeom>
           <a:solidFill>
-            <a:srgbClr val="DDECF4"/>
+            <a:srgbClr val="E5F5FB"/>
           </a:solidFill>
           <a:ln>
             <a:noFill/>
@@ -14307,8 +12203,8 @@
         </p:nvSpPr>
         <p:spPr>
           <a:xfrm>
-            <a:off x="658368" y="2895600"/>
-            <a:ext cx="10984687" cy="1386839"/>
+            <a:off x="859536" y="4169663"/>
+            <a:ext cx="10479024" cy="1051560"/>
           </a:xfrm>
           <a:prstGeom prst="rect">
             <a:avLst/>
@@ -14323,173 +12219,24 @@
           <a:p>
             <a:pPr>
               <a:spcAft>
-                <a:spcPts val="300"/>
+                <a:spcPts val="700"/>
               </a:spcAft>
             </a:pPr>
             <a:r>
-              <a:rPr sz="1900" b="1" i="0">
-                <a:solidFill>
-                  <a:srgbClr val="1A1A1A"/>
-                </a:solidFill>
-                <a:latin typeface="Arial"/>
-              </a:rPr>
-              <a:t>The re-use rate across them</a:t>
-            </a:r>
-          </a:p>
-          <a:p>
-            <a:pPr>
-              <a:spcAft>
-                <a:spcPts val="300"/>
-              </a:spcAft>
-            </a:pPr>
-            <a:r>
-              <a:rPr sz="1550" b="0" i="0">
-                <a:solidFill>
-                  <a:srgbClr val="595959"/>
-                </a:solidFill>
-                <a:latin typeface="Arial"/>
-              </a:rPr>
-              <a:t>How much of the new work consumes a shared block instead of rebuilding it.</a:t>
-            </a:r>
-          </a:p>
-        </p:txBody>
-      </p:sp>
-      <p:sp>
-        <p:nvSpPr>
-          <p:cNvPr id="7" name="Rectangle 6"/>
-          <p:cNvSpPr/>
-          <p:nvPr/>
-        </p:nvSpPr>
-        <p:spPr>
-          <a:xfrm>
-            <a:off x="621792" y="4287011"/>
-            <a:ext cx="10881360" cy="12700"/>
-          </a:xfrm>
-          <a:prstGeom prst="rect">
-            <a:avLst/>
-          </a:prstGeom>
-          <a:solidFill>
-            <a:srgbClr val="DDECF4"/>
-          </a:solidFill>
-          <a:ln>
-            <a:noFill/>
-          </a:ln>
-          <a:effectLst/>
-        </p:spPr>
-        <p:style>
-          <a:lnRef idx="1">
-            <a:schemeClr val="accent1"/>
-          </a:lnRef>
-          <a:fillRef idx="3">
-            <a:schemeClr val="accent1"/>
-          </a:fillRef>
-          <a:effectRef idx="2">
-            <a:schemeClr val="accent1"/>
-          </a:effectRef>
-          <a:fontRef idx="minor">
-            <a:schemeClr val="lt1"/>
-          </a:fontRef>
-        </p:style>
-        <p:txBody>
-          <a:bodyPr rtlCol="0" anchor="ctr"/>
-          <a:lstStyle/>
-          <a:p>
-            <a:pPr algn="ctr"/>
-          </a:p>
-        </p:txBody>
-      </p:sp>
-      <p:sp>
-        <p:nvSpPr>
-          <p:cNvPr id="8" name="TextBox 7"/>
-          <p:cNvSpPr txBox="1"/>
-          <p:nvPr/>
-        </p:nvSpPr>
-        <p:spPr>
-          <a:xfrm>
-            <a:off x="658368" y="4328159"/>
-            <a:ext cx="10984687" cy="1386839"/>
-          </a:xfrm>
-          <a:prstGeom prst="rect">
-            <a:avLst/>
-          </a:prstGeom>
-          <a:noFill/>
-        </p:spPr>
-        <p:txBody>
-          <a:bodyPr wrap="square">
-            <a:spAutoFit/>
-          </a:bodyPr>
-          <a:lstStyle/>
-          <a:p>
-            <a:pPr>
-              <a:spcAft>
-                <a:spcPts val="300"/>
-              </a:spcAft>
-            </a:pPr>
-            <a:r>
-              <a:rPr sz="1900" b="1" i="0">
-                <a:solidFill>
-                  <a:srgbClr val="1A1A1A"/>
-                </a:solidFill>
-                <a:latin typeface="Arial"/>
-              </a:rPr>
-              <a:t>Shared platforms in place</a:t>
-            </a:r>
-          </a:p>
-          <a:p>
-            <a:pPr>
-              <a:spcAft>
-                <a:spcPts val="300"/>
-              </a:spcAft>
-            </a:pPr>
-            <a:r>
-              <a:rPr sz="1550" b="0" i="0">
-                <a:solidFill>
-                  <a:srgbClr val="595959"/>
-                </a:solidFill>
-                <a:latin typeface="Arial"/>
-              </a:rPr>
-              <a:t>Which of identity and data exchange are authoritative and available.</a:t>
-            </a:r>
-          </a:p>
-        </p:txBody>
-      </p:sp>
-      <p:sp>
-        <p:nvSpPr>
-          <p:cNvPr id="9" name="TextBox 8"/>
-          <p:cNvSpPr txBox="1"/>
-          <p:nvPr/>
-        </p:nvSpPr>
-        <p:spPr>
-          <a:xfrm>
-            <a:off x="658368" y="5870448"/>
-            <a:ext cx="10881360" cy="548640"/>
-          </a:xfrm>
-          <a:prstGeom prst="rect">
-            <a:avLst/>
-          </a:prstGeom>
-          <a:noFill/>
-        </p:spPr>
-        <p:txBody>
-          <a:bodyPr wrap="square">
-            <a:spAutoFit/>
-          </a:bodyPr>
-          <a:lstStyle/>
-          <a:p>
-            <a:r>
-              <a:rPr sz="1550" b="1" i="0">
+              <a:rPr sz="2300" b="1" i="0">
                 <a:solidFill>
                   <a:srgbClr val="006E96"/>
                 </a:solidFill>
                 <a:latin typeface="Arial"/>
               </a:rPr>
-              <a:t>It sustains funding across a change of government, and catches a drifting sector early.</a:t>
-            </a:r>
-          </a:p>
-        </p:txBody>
-      </p:sp>
-      <p:sp>
-        <p:nvSpPr>
-          <p:cNvPr id="10" name="TextBox 9"/>
+              <a:t>A portability statement, not worked examples — each sector still needs its own discovery on the ground.</a:t>
+            </a:r>
+          </a:p>
+        </p:txBody>
+      </p:sp>
+      <p:sp>
+        <p:nvSpPr>
+          <p:cNvPr id="7" name="TextBox 6"/>
           <p:cNvSpPr txBox="1"/>
           <p:nvPr/>
         </p:nvSpPr>
@@ -14541,6 +12288,1737 @@
       <p:grpSpPr/>
       <p:sp>
         <p:nvSpPr>
+          <p:cNvPr id="2" name="Rectangle 1"/>
+          <p:cNvSpPr/>
+          <p:nvPr/>
+        </p:nvSpPr>
+        <p:spPr>
+          <a:xfrm>
+            <a:off x="457200" y="384048"/>
+            <a:ext cx="45720" cy="256032"/>
+          </a:xfrm>
+          <a:prstGeom prst="rect">
+            <a:avLst/>
+          </a:prstGeom>
+          <a:solidFill>
+            <a:srgbClr val="009CD6"/>
+          </a:solidFill>
+          <a:ln>
+            <a:noFill/>
+          </a:ln>
+          <a:effectLst/>
+        </p:spPr>
+        <p:style>
+          <a:lnRef idx="1">
+            <a:schemeClr val="accent1"/>
+          </a:lnRef>
+          <a:fillRef idx="3">
+            <a:schemeClr val="accent1"/>
+          </a:fillRef>
+          <a:effectRef idx="2">
+            <a:schemeClr val="accent1"/>
+          </a:effectRef>
+          <a:fontRef idx="minor">
+            <a:schemeClr val="lt1"/>
+          </a:fontRef>
+        </p:style>
+        <p:txBody>
+          <a:bodyPr rtlCol="0" anchor="ctr"/>
+          <a:lstStyle/>
+          <a:p>
+            <a:pPr algn="ctr"/>
+          </a:p>
+        </p:txBody>
+      </p:sp>
+      <p:sp>
+        <p:nvSpPr>
+          <p:cNvPr id="3" name="TextBox 2"/>
+          <p:cNvSpPr txBox="1"/>
+          <p:nvPr/>
+        </p:nvSpPr>
+        <p:spPr>
+          <a:xfrm>
+            <a:off x="621792" y="274320"/>
+            <a:ext cx="11247120" cy="914400"/>
+          </a:xfrm>
+          <a:prstGeom prst="rect">
+            <a:avLst/>
+          </a:prstGeom>
+          <a:noFill/>
+        </p:spPr>
+        <p:txBody>
+          <a:bodyPr wrap="square">
+            <a:spAutoFit/>
+          </a:bodyPr>
+          <a:lstStyle/>
+          <a:p>
+            <a:r>
+              <a:rPr sz="2800" b="1" i="0">
+                <a:solidFill>
+                  <a:srgbClr val="1A1A1A"/>
+                </a:solidFill>
+                <a:latin typeface="Arial"/>
+              </a:rPr>
+              <a:t>Wave 1 looks like one sector. It is the foundation the rollout stands on</a:t>
+            </a:r>
+          </a:p>
+        </p:txBody>
+      </p:sp>
+      <p:sp>
+        <p:nvSpPr>
+          <p:cNvPr id="4" name="Rounded Rectangle 3"/>
+          <p:cNvSpPr/>
+          <p:nvPr/>
+        </p:nvSpPr>
+        <p:spPr>
+          <a:xfrm>
+            <a:off x="2651760" y="1737360"/>
+            <a:ext cx="4754880" cy="1463040"/>
+          </a:xfrm>
+          <a:prstGeom prst="roundRect">
+            <a:avLst>
+              <a:gd name="adj" fmla="val 8000"/>
+            </a:avLst>
+          </a:prstGeom>
+          <a:solidFill>
+            <a:srgbClr val="E5F5FB"/>
+          </a:solidFill>
+          <a:ln>
+            <a:noFill/>
+          </a:ln>
+          <a:effectLst/>
+        </p:spPr>
+        <p:style>
+          <a:lnRef idx="1">
+            <a:schemeClr val="accent1"/>
+          </a:lnRef>
+          <a:fillRef idx="3">
+            <a:schemeClr val="accent1"/>
+          </a:fillRef>
+          <a:effectRef idx="2">
+            <a:schemeClr val="accent1"/>
+          </a:effectRef>
+          <a:fontRef idx="minor">
+            <a:schemeClr val="lt1"/>
+          </a:fontRef>
+        </p:style>
+        <p:txBody>
+          <a:bodyPr rtlCol="0" anchor="t" lIns="128016" rIns="128016" tIns="91440" bIns="54864" wrap="square"/>
+          <a:lstStyle/>
+          <a:p>
+            <a:pPr algn="l">
+              <a:spcAft>
+                <a:spcPts val="300"/>
+              </a:spcAft>
+            </a:pPr>
+            <a:r>
+              <a:rPr sz="1500" b="1" i="0">
+                <a:solidFill>
+                  <a:srgbClr val="006E96"/>
+                </a:solidFill>
+                <a:latin typeface="Arial"/>
+              </a:rPr>
+              <a:t>WAVE 1 — ONE SECTOR, THE FULL METHOD, END TO END</a:t>
+            </a:r>
+          </a:p>
+          <a:p>
+            <a:pPr algn="l">
+              <a:spcAft>
+                <a:spcPts val="300"/>
+              </a:spcAft>
+            </a:pPr>
+            <a:r>
+              <a:rPr sz="1300" b="0" i="0">
+                <a:solidFill>
+                  <a:srgbClr val="1A1A1A"/>
+                </a:solidFill>
+                <a:latin typeface="Arial"/>
+              </a:rPr>
+              <a:t>A sector with a clear flagship the minister cares about — the single learner record, the single patient record.</a:t>
+            </a:r>
+          </a:p>
+        </p:txBody>
+      </p:sp>
+      <p:sp>
+        <p:nvSpPr>
+          <p:cNvPr id="5" name="Rounded Rectangle 4"/>
+          <p:cNvSpPr/>
+          <p:nvPr/>
+        </p:nvSpPr>
+        <p:spPr>
+          <a:xfrm>
+            <a:off x="658368" y="3383280"/>
+            <a:ext cx="8732520" cy="1600200"/>
+          </a:xfrm>
+          <a:prstGeom prst="roundRect">
+            <a:avLst>
+              <a:gd name="adj" fmla="val 8000"/>
+            </a:avLst>
+          </a:prstGeom>
+          <a:solidFill>
+            <a:srgbClr val="006E96"/>
+          </a:solidFill>
+          <a:ln>
+            <a:noFill/>
+          </a:ln>
+          <a:effectLst/>
+        </p:spPr>
+        <p:style>
+          <a:lnRef idx="1">
+            <a:schemeClr val="accent1"/>
+          </a:lnRef>
+          <a:fillRef idx="3">
+            <a:schemeClr val="accent1"/>
+          </a:fillRef>
+          <a:effectRef idx="2">
+            <a:schemeClr val="accent1"/>
+          </a:effectRef>
+          <a:fontRef idx="minor">
+            <a:schemeClr val="lt1"/>
+          </a:fontRef>
+        </p:style>
+        <p:txBody>
+          <a:bodyPr rtlCol="0" anchor="t" lIns="128016" rIns="128016" tIns="91440" bIns="54864" wrap="square"/>
+          <a:lstStyle/>
+          <a:p>
+            <a:pPr algn="l">
+              <a:spcAft>
+                <a:spcPts val="300"/>
+              </a:spcAft>
+            </a:pPr>
+            <a:r>
+              <a:rPr sz="1500" b="1" i="0">
+                <a:solidFill>
+                  <a:srgbClr val="FFFFFF"/>
+                </a:solidFill>
+                <a:latin typeface="Arial"/>
+              </a:rPr>
+              <a:t>WHAT WAVE 1 REALLY BUILDS — THE NATIONAL FOUNDATIONS</a:t>
+            </a:r>
+          </a:p>
+          <a:p>
+            <a:pPr algn="l">
+              <a:spcAft>
+                <a:spcPts val="300"/>
+              </a:spcAft>
+            </a:pPr>
+            <a:r>
+              <a:rPr sz="1300" b="0" i="0">
+                <a:solidFill>
+                  <a:srgbClr val="FFFFFF"/>
+                </a:solidFill>
+                <a:latin typeface="Arial"/>
+              </a:rPr>
+              <a:t>The permanent team  ·  the governance board  ·  the first shared platforms: identity, data exchange</a:t>
+            </a:r>
+          </a:p>
+          <a:p>
+            <a:pPr algn="l">
+              <a:spcAft>
+                <a:spcPts val="300"/>
+              </a:spcAft>
+            </a:pPr>
+            <a:r>
+              <a:rPr sz="1300" b="0" i="0">
+                <a:solidFill>
+                  <a:srgbClr val="FFFFFF"/>
+                </a:solidFill>
+                <a:latin typeface="Arial"/>
+              </a:rPr>
+              <a:t>Every later sector stands on this — none of them builds it again.</a:t>
+            </a:r>
+          </a:p>
+        </p:txBody>
+      </p:sp>
+      <p:sp>
+        <p:nvSpPr>
+          <p:cNvPr id="6" name="Rectangle 5"/>
+          <p:cNvSpPr/>
+          <p:nvPr/>
+        </p:nvSpPr>
+        <p:spPr>
+          <a:xfrm>
+            <a:off x="9646920" y="1737360"/>
+            <a:ext cx="45720" cy="3246120"/>
+          </a:xfrm>
+          <a:prstGeom prst="rect">
+            <a:avLst/>
+          </a:prstGeom>
+          <a:solidFill>
+            <a:srgbClr val="009CD6"/>
+          </a:solidFill>
+          <a:ln>
+            <a:noFill/>
+          </a:ln>
+          <a:effectLst/>
+        </p:spPr>
+        <p:style>
+          <a:lnRef idx="1">
+            <a:schemeClr val="accent1"/>
+          </a:lnRef>
+          <a:fillRef idx="3">
+            <a:schemeClr val="accent1"/>
+          </a:fillRef>
+          <a:effectRef idx="2">
+            <a:schemeClr val="accent1"/>
+          </a:effectRef>
+          <a:fontRef idx="minor">
+            <a:schemeClr val="lt1"/>
+          </a:fontRef>
+        </p:style>
+        <p:txBody>
+          <a:bodyPr rtlCol="0" anchor="ctr"/>
+          <a:lstStyle/>
+          <a:p>
+            <a:pPr algn="ctr"/>
+          </a:p>
+        </p:txBody>
+      </p:sp>
+      <p:sp>
+        <p:nvSpPr>
+          <p:cNvPr id="7" name="TextBox 6"/>
+          <p:cNvSpPr txBox="1"/>
+          <p:nvPr/>
+        </p:nvSpPr>
+        <p:spPr>
+          <a:xfrm>
+            <a:off x="9829800" y="1737360"/>
+            <a:ext cx="1737360" cy="3246120"/>
+          </a:xfrm>
+          <a:prstGeom prst="rect">
+            <a:avLst/>
+          </a:prstGeom>
+          <a:noFill/>
+        </p:spPr>
+        <p:txBody>
+          <a:bodyPr wrap="square">
+            <a:spAutoFit/>
+          </a:bodyPr>
+          <a:lstStyle/>
+          <a:p>
+            <a:pPr>
+              <a:spcAft>
+                <a:spcPts val="800"/>
+              </a:spcAft>
+            </a:pPr>
+            <a:r>
+              <a:rPr sz="1250" b="0" i="1">
+                <a:solidFill>
+                  <a:srgbClr val="595959"/>
+                </a:solidFill>
+                <a:latin typeface="Arial"/>
+              </a:rPr>
+              <a:t>The sector is what the minister sees.</a:t>
+            </a:r>
+          </a:p>
+          <a:p>
+            <a:pPr>
+              <a:spcAft>
+                <a:spcPts val="800"/>
+              </a:spcAft>
+            </a:pPr>
+            <a:r>
+              <a:rPr sz="1250" b="0" i="1">
+                <a:solidFill>
+                  <a:srgbClr val="595959"/>
+                </a:solidFill>
+                <a:latin typeface="Arial"/>
+              </a:rPr>
+              <a:t>The base is what the country keeps.</a:t>
+            </a:r>
+          </a:p>
+        </p:txBody>
+      </p:sp>
+      <p:sp>
+        <p:nvSpPr>
+          <p:cNvPr id="8" name="TextBox 7"/>
+          <p:cNvSpPr txBox="1"/>
+          <p:nvPr/>
+        </p:nvSpPr>
+        <p:spPr>
+          <a:xfrm>
+            <a:off x="658368" y="5760720"/>
+            <a:ext cx="10881360" cy="548640"/>
+          </a:xfrm>
+          <a:prstGeom prst="rect">
+            <a:avLst/>
+          </a:prstGeom>
+          <a:noFill/>
+        </p:spPr>
+        <p:txBody>
+          <a:bodyPr wrap="square">
+            <a:spAutoFit/>
+          </a:bodyPr>
+          <a:lstStyle/>
+          <a:p>
+            <a:r>
+              <a:rPr sz="1550" b="1" i="0">
+                <a:solidFill>
+                  <a:srgbClr val="006E96"/>
+                </a:solidFill>
+                <a:latin typeface="Arial"/>
+              </a:rPr>
+              <a:t>One sector, done well — and the national foundations, laid.</a:t>
+            </a:r>
+          </a:p>
+        </p:txBody>
+      </p:sp>
+      <p:sp>
+        <p:nvSpPr>
+          <p:cNvPr id="9" name="TextBox 8"/>
+          <p:cNvSpPr txBox="1"/>
+          <p:nvPr/>
+        </p:nvSpPr>
+        <p:spPr>
+          <a:xfrm>
+            <a:off x="457200" y="6473952"/>
+            <a:ext cx="7772400" cy="292608"/>
+          </a:xfrm>
+          <a:prstGeom prst="rect">
+            <a:avLst/>
+          </a:prstGeom>
+          <a:noFill/>
+        </p:spPr>
+        <p:txBody>
+          <a:bodyPr wrap="square">
+            <a:spAutoFit/>
+          </a:bodyPr>
+          <a:lstStyle/>
+          <a:p>
+            <a:r>
+              <a:rPr sz="900" b="0" i="0">
+                <a:solidFill>
+                  <a:srgbClr val="595959"/>
+                </a:solidFill>
+                <a:latin typeface="Arial"/>
+              </a:rPr>
+              <a:t>5.3 · Roll it out across sectors — and why the second is cheaper</a:t>
+            </a:r>
+          </a:p>
+        </p:txBody>
+      </p:sp>
+    </p:spTree>
+  </p:cSld>
+  <p:clrMapOvr>
+    <a:masterClrMapping/>
+  </p:clrMapOvr>
+</p:sld>
+</file>
+
+<file path=ppt/slides/slide22.xml><?xml version="1.0" encoding="utf-8"?>
+<p:sld xmlns:a="http://schemas.openxmlformats.org/drawingml/2006/main" xmlns:p="http://schemas.openxmlformats.org/presentationml/2006/main" xmlns:r="http://schemas.openxmlformats.org/officeDocument/2006/relationships">
+  <p:cSld>
+    <p:spTree>
+      <p:nvGrpSpPr>
+        <p:cNvPr id="1" name=""/>
+        <p:cNvGrpSpPr/>
+        <p:nvPr/>
+      </p:nvGrpSpPr>
+      <p:grpSpPr/>
+      <p:sp>
+        <p:nvSpPr>
+          <p:cNvPr id="2" name="Rectangle 1"/>
+          <p:cNvSpPr/>
+          <p:nvPr/>
+        </p:nvSpPr>
+        <p:spPr>
+          <a:xfrm>
+            <a:off x="457200" y="384048"/>
+            <a:ext cx="45720" cy="256032"/>
+          </a:xfrm>
+          <a:prstGeom prst="rect">
+            <a:avLst/>
+          </a:prstGeom>
+          <a:solidFill>
+            <a:srgbClr val="009CD6"/>
+          </a:solidFill>
+          <a:ln>
+            <a:noFill/>
+          </a:ln>
+          <a:effectLst/>
+        </p:spPr>
+        <p:style>
+          <a:lnRef idx="1">
+            <a:schemeClr val="accent1"/>
+          </a:lnRef>
+          <a:fillRef idx="3">
+            <a:schemeClr val="accent1"/>
+          </a:fillRef>
+          <a:effectRef idx="2">
+            <a:schemeClr val="accent1"/>
+          </a:effectRef>
+          <a:fontRef idx="minor">
+            <a:schemeClr val="lt1"/>
+          </a:fontRef>
+        </p:style>
+        <p:txBody>
+          <a:bodyPr rtlCol="0" anchor="ctr"/>
+          <a:lstStyle/>
+          <a:p>
+            <a:pPr algn="ctr"/>
+          </a:p>
+        </p:txBody>
+      </p:sp>
+      <p:sp>
+        <p:nvSpPr>
+          <p:cNvPr id="3" name="TextBox 2"/>
+          <p:cNvSpPr txBox="1"/>
+          <p:nvPr/>
+        </p:nvSpPr>
+        <p:spPr>
+          <a:xfrm>
+            <a:off x="621792" y="274320"/>
+            <a:ext cx="11247120" cy="914400"/>
+          </a:xfrm>
+          <a:prstGeom prst="rect">
+            <a:avLst/>
+          </a:prstGeom>
+          <a:noFill/>
+        </p:spPr>
+        <p:txBody>
+          <a:bodyPr wrap="square">
+            <a:spAutoFit/>
+          </a:bodyPr>
+          <a:lstStyle/>
+          <a:p>
+            <a:r>
+              <a:rPr sz="2800" b="1" i="0">
+                <a:solidFill>
+                  <a:srgbClr val="1A1A1A"/>
+                </a:solidFill>
+                <a:latin typeface="Arial"/>
+              </a:rPr>
+              <a:t>From Wave 2 each sector is cheaper — if the same board governs the pipeline</a:t>
+            </a:r>
+          </a:p>
+        </p:txBody>
+      </p:sp>
+      <p:sp>
+        <p:nvSpPr>
+          <p:cNvPr id="4" name="Rounded Rectangle 3"/>
+          <p:cNvSpPr/>
+          <p:nvPr/>
+        </p:nvSpPr>
+        <p:spPr>
+          <a:xfrm>
+            <a:off x="658368" y="1554480"/>
+            <a:ext cx="10881360" cy="457200"/>
+          </a:xfrm>
+          <a:prstGeom prst="roundRect">
+            <a:avLst>
+              <a:gd name="adj" fmla="val 30000"/>
+            </a:avLst>
+          </a:prstGeom>
+          <a:solidFill>
+            <a:srgbClr val="006E96"/>
+          </a:solidFill>
+          <a:ln>
+            <a:noFill/>
+          </a:ln>
+          <a:effectLst/>
+        </p:spPr>
+        <p:style>
+          <a:lnRef idx="1">
+            <a:schemeClr val="accent1"/>
+          </a:lnRef>
+          <a:fillRef idx="3">
+            <a:schemeClr val="accent1"/>
+          </a:fillRef>
+          <a:effectRef idx="2">
+            <a:schemeClr val="accent1"/>
+          </a:effectRef>
+          <a:fontRef idx="minor">
+            <a:schemeClr val="lt1"/>
+          </a:fontRef>
+        </p:style>
+        <p:txBody>
+          <a:bodyPr rtlCol="0" anchor="ctr" wrap="square"/>
+          <a:lstStyle/>
+          <a:p>
+            <a:pPr algn="ctr"/>
+            <a:r>
+              <a:rPr sz="1200" b="1" i="0">
+                <a:solidFill>
+                  <a:srgbClr val="FFFFFF"/>
+                </a:solidFill>
+                <a:latin typeface="Arial"/>
+              </a:rPr>
+              <a:t>THE SAME BOARD GOVERNS THE NATIONAL PIPELINE — which sector next, what each must reuse, where an exception is warranted</a:t>
+            </a:r>
+          </a:p>
+        </p:txBody>
+      </p:sp>
+      <p:sp>
+        <p:nvSpPr>
+          <p:cNvPr id="5" name="Rounded Rectangle 4"/>
+          <p:cNvSpPr/>
+          <p:nvPr/>
+        </p:nvSpPr>
+        <p:spPr>
+          <a:xfrm>
+            <a:off x="658368" y="2285999"/>
+            <a:ext cx="3574222" cy="2606040"/>
+          </a:xfrm>
+          <a:prstGeom prst="roundRect">
+            <a:avLst>
+              <a:gd name="adj" fmla="val 8000"/>
+            </a:avLst>
+          </a:prstGeom>
+          <a:solidFill>
+            <a:srgbClr val="009CD6"/>
+          </a:solidFill>
+          <a:ln>
+            <a:noFill/>
+          </a:ln>
+          <a:effectLst/>
+        </p:spPr>
+        <p:style>
+          <a:lnRef idx="1">
+            <a:schemeClr val="accent1"/>
+          </a:lnRef>
+          <a:fillRef idx="3">
+            <a:schemeClr val="accent1"/>
+          </a:fillRef>
+          <a:effectRef idx="2">
+            <a:schemeClr val="accent1"/>
+          </a:effectRef>
+          <a:fontRef idx="minor">
+            <a:schemeClr val="lt1"/>
+          </a:fontRef>
+        </p:style>
+        <p:txBody>
+          <a:bodyPr rtlCol="0" anchor="t" lIns="128016" rIns="128016" tIns="91440" bIns="54864" wrap="square"/>
+          <a:lstStyle/>
+          <a:p>
+            <a:pPr algn="l">
+              <a:spcAft>
+                <a:spcPts val="300"/>
+              </a:spcAft>
+            </a:pPr>
+            <a:r>
+              <a:rPr sz="1300" b="1" i="0">
+                <a:solidFill>
+                  <a:srgbClr val="FFFFFF"/>
+                </a:solidFill>
+                <a:latin typeface="Arial"/>
+              </a:rPr>
+              <a:t>WAVE 1 — the foundation sector</a:t>
+            </a:r>
+          </a:p>
+          <a:p>
+            <a:pPr algn="l">
+              <a:spcAft>
+                <a:spcPts val="300"/>
+              </a:spcAft>
+            </a:pPr>
+            <a:r>
+              <a:rPr sz="1150" b="0" i="0">
+                <a:solidFill>
+                  <a:srgbClr val="FFFFFF"/>
+                </a:solidFill>
+                <a:latin typeface="Arial"/>
+              </a:rPr>
+              <a:t>Full method, end to end</a:t>
+            </a:r>
+          </a:p>
+          <a:p>
+            <a:pPr algn="l">
+              <a:spcAft>
+                <a:spcPts val="300"/>
+              </a:spcAft>
+            </a:pPr>
+            <a:r>
+              <a:rPr sz="1150" b="0" i="0">
+                <a:solidFill>
+                  <a:srgbClr val="FFFFFF"/>
+                </a:solidFill>
+                <a:latin typeface="Arial"/>
+              </a:rPr>
+              <a:t>Builds the team, the board, identity, data exchange</a:t>
+            </a:r>
+          </a:p>
+        </p:txBody>
+      </p:sp>
+      <p:sp>
+        <p:nvSpPr>
+          <p:cNvPr id="6" name="Rounded Rectangle 5"/>
+          <p:cNvSpPr/>
+          <p:nvPr/>
+        </p:nvSpPr>
+        <p:spPr>
+          <a:xfrm>
+            <a:off x="4397182" y="2859328"/>
+            <a:ext cx="2792361" cy="2032711"/>
+          </a:xfrm>
+          <a:prstGeom prst="roundRect">
+            <a:avLst>
+              <a:gd name="adj" fmla="val 8000"/>
+            </a:avLst>
+          </a:prstGeom>
+          <a:solidFill>
+            <a:srgbClr val="E5F5FB"/>
+          </a:solidFill>
+          <a:ln>
+            <a:noFill/>
+          </a:ln>
+          <a:effectLst/>
+        </p:spPr>
+        <p:style>
+          <a:lnRef idx="1">
+            <a:schemeClr val="accent1"/>
+          </a:lnRef>
+          <a:fillRef idx="3">
+            <a:schemeClr val="accent1"/>
+          </a:fillRef>
+          <a:effectRef idx="2">
+            <a:schemeClr val="accent1"/>
+          </a:effectRef>
+          <a:fontRef idx="minor">
+            <a:schemeClr val="lt1"/>
+          </a:fontRef>
+        </p:style>
+        <p:txBody>
+          <a:bodyPr rtlCol="0" anchor="t" lIns="128016" rIns="128016" tIns="91440" bIns="54864" wrap="square"/>
+          <a:lstStyle/>
+          <a:p>
+            <a:pPr algn="l">
+              <a:spcAft>
+                <a:spcPts val="300"/>
+              </a:spcAft>
+            </a:pPr>
+            <a:r>
+              <a:rPr sz="1300" b="1" i="0">
+                <a:solidFill>
+                  <a:srgbClr val="006E96"/>
+                </a:solidFill>
+                <a:latin typeface="Arial"/>
+              </a:rPr>
+              <a:t>WAVE 2 — health</a:t>
+            </a:r>
+          </a:p>
+          <a:p>
+            <a:pPr algn="l">
+              <a:spcAft>
+                <a:spcPts val="300"/>
+              </a:spcAft>
+            </a:pPr>
+            <a:r>
+              <a:rPr sz="1150" b="0" i="0">
+                <a:solidFill>
+                  <a:srgbClr val="1A1A1A"/>
+                </a:solidFill>
+                <a:latin typeface="Arial"/>
+              </a:rPr>
+              <a:t>Consumes the platforms</a:t>
+            </a:r>
+          </a:p>
+          <a:p>
+            <a:pPr algn="l">
+              <a:spcAft>
+                <a:spcPts val="300"/>
+              </a:spcAft>
+            </a:pPr>
+            <a:r>
+              <a:rPr sz="1150" b="0" i="0">
+                <a:solidFill>
+                  <a:srgbClr val="1A1A1A"/>
+                </a:solidFill>
+                <a:latin typeface="Arial"/>
+              </a:rPr>
+              <a:t>Lighter method — team, framework and governance in place</a:t>
+            </a:r>
+          </a:p>
+        </p:txBody>
+      </p:sp>
+      <p:cxnSp>
+        <p:nvCxnSpPr>
+          <p:cNvPr id="7" name="Connector 6"/>
+          <p:cNvCxnSpPr/>
+          <p:nvPr/>
+        </p:nvCxnSpPr>
+        <p:spPr>
+          <a:xfrm>
+            <a:off x="4250878" y="4480559"/>
+            <a:ext cx="128016" cy="0"/>
+          </a:xfrm>
+          <a:prstGeom prst="line">
+            <a:avLst/>
+          </a:prstGeom>
+          <a:ln w="25400">
+            <a:solidFill>
+              <a:srgbClr val="006E96"/>
+            </a:solidFill>
+            <a:tailEnd type="triangle" w="med" len="med"/>
+          </a:ln>
+        </p:spPr>
+        <p:style>
+          <a:lnRef idx="2">
+            <a:schemeClr val="accent1"/>
+          </a:lnRef>
+          <a:fillRef idx="0">
+            <a:schemeClr val="accent1"/>
+          </a:fillRef>
+          <a:effectRef idx="1">
+            <a:schemeClr val="accent1"/>
+          </a:effectRef>
+          <a:fontRef idx="minor">
+            <a:schemeClr val="tx1"/>
+          </a:fontRef>
+        </p:style>
+      </p:cxnSp>
+      <p:sp>
+        <p:nvSpPr>
+          <p:cNvPr id="8" name="Rounded Rectangle 7"/>
+          <p:cNvSpPr/>
+          <p:nvPr/>
+        </p:nvSpPr>
+        <p:spPr>
+          <a:xfrm>
+            <a:off x="7354135" y="3276295"/>
+            <a:ext cx="2233889" cy="1615744"/>
+          </a:xfrm>
+          <a:prstGeom prst="roundRect">
+            <a:avLst>
+              <a:gd name="adj" fmla="val 8000"/>
+            </a:avLst>
+          </a:prstGeom>
+          <a:solidFill>
+            <a:srgbClr val="E5F5FB"/>
+          </a:solidFill>
+          <a:ln>
+            <a:noFill/>
+          </a:ln>
+          <a:effectLst/>
+        </p:spPr>
+        <p:style>
+          <a:lnRef idx="1">
+            <a:schemeClr val="accent1"/>
+          </a:lnRef>
+          <a:fillRef idx="3">
+            <a:schemeClr val="accent1"/>
+          </a:fillRef>
+          <a:effectRef idx="2">
+            <a:schemeClr val="accent1"/>
+          </a:effectRef>
+          <a:fontRef idx="minor">
+            <a:schemeClr val="lt1"/>
+          </a:fontRef>
+        </p:style>
+        <p:txBody>
+          <a:bodyPr rtlCol="0" anchor="t" lIns="128016" rIns="128016" tIns="91440" bIns="54864" wrap="square"/>
+          <a:lstStyle/>
+          <a:p>
+            <a:pPr algn="l">
+              <a:spcAft>
+                <a:spcPts val="300"/>
+              </a:spcAft>
+            </a:pPr>
+            <a:r>
+              <a:rPr sz="1300" b="1" i="0">
+                <a:solidFill>
+                  <a:srgbClr val="006E96"/>
+                </a:solidFill>
+                <a:latin typeface="Arial"/>
+              </a:rPr>
+              <a:t>WAVE 3 — agriculture</a:t>
+            </a:r>
+          </a:p>
+          <a:p>
+            <a:pPr algn="l">
+              <a:spcAft>
+                <a:spcPts val="300"/>
+              </a:spcAft>
+            </a:pPr>
+            <a:r>
+              <a:rPr sz="1150" b="0" i="0">
+                <a:solidFill>
+                  <a:srgbClr val="1A1A1A"/>
+                </a:solidFill>
+                <a:latin typeface="Arial"/>
+              </a:rPr>
+              <a:t>Consumes more</a:t>
+            </a:r>
+          </a:p>
+          <a:p>
+            <a:pPr algn="l">
+              <a:spcAft>
+                <a:spcPts val="300"/>
+              </a:spcAft>
+            </a:pPr>
+            <a:r>
+              <a:rPr sz="1150" b="0" i="0">
+                <a:solidFill>
+                  <a:srgbClr val="1A1A1A"/>
+                </a:solidFill>
+                <a:latin typeface="Arial"/>
+              </a:rPr>
+              <a:t>Faster, for less</a:t>
+            </a:r>
+          </a:p>
+        </p:txBody>
+      </p:sp>
+      <p:cxnSp>
+        <p:nvCxnSpPr>
+          <p:cNvPr id="9" name="Connector 8"/>
+          <p:cNvCxnSpPr/>
+          <p:nvPr/>
+        </p:nvCxnSpPr>
+        <p:spPr>
+          <a:xfrm>
+            <a:off x="7207831" y="4480559"/>
+            <a:ext cx="128016" cy="0"/>
+          </a:xfrm>
+          <a:prstGeom prst="line">
+            <a:avLst/>
+          </a:prstGeom>
+          <a:ln w="25400">
+            <a:solidFill>
+              <a:srgbClr val="006E96"/>
+            </a:solidFill>
+            <a:tailEnd type="triangle" w="med" len="med"/>
+          </a:ln>
+        </p:spPr>
+        <p:style>
+          <a:lnRef idx="2">
+            <a:schemeClr val="accent1"/>
+          </a:lnRef>
+          <a:fillRef idx="0">
+            <a:schemeClr val="accent1"/>
+          </a:fillRef>
+          <a:effectRef idx="1">
+            <a:schemeClr val="accent1"/>
+          </a:effectRef>
+          <a:fontRef idx="minor">
+            <a:schemeClr val="tx1"/>
+          </a:fontRef>
+        </p:style>
+      </p:cxnSp>
+      <p:sp>
+        <p:nvSpPr>
+          <p:cNvPr id="10" name="Rounded Rectangle 9"/>
+          <p:cNvSpPr/>
+          <p:nvPr/>
+        </p:nvSpPr>
+        <p:spPr>
+          <a:xfrm>
+            <a:off x="9752616" y="3589020"/>
+            <a:ext cx="1787111" cy="1303020"/>
+          </a:xfrm>
+          <a:prstGeom prst="roundRect">
+            <a:avLst>
+              <a:gd name="adj" fmla="val 8000"/>
+            </a:avLst>
+          </a:prstGeom>
+          <a:solidFill>
+            <a:srgbClr val="E5F5FB"/>
+          </a:solidFill>
+          <a:ln>
+            <a:noFill/>
+          </a:ln>
+          <a:effectLst/>
+        </p:spPr>
+        <p:style>
+          <a:lnRef idx="1">
+            <a:schemeClr val="accent1"/>
+          </a:lnRef>
+          <a:fillRef idx="3">
+            <a:schemeClr val="accent1"/>
+          </a:fillRef>
+          <a:effectRef idx="2">
+            <a:schemeClr val="accent1"/>
+          </a:effectRef>
+          <a:fontRef idx="minor">
+            <a:schemeClr val="lt1"/>
+          </a:fontRef>
+        </p:style>
+        <p:txBody>
+          <a:bodyPr rtlCol="0" anchor="t" lIns="128016" rIns="128016" tIns="91440" bIns="54864" wrap="square"/>
+          <a:lstStyle/>
+          <a:p>
+            <a:pPr algn="l">
+              <a:spcAft>
+                <a:spcPts val="300"/>
+              </a:spcAft>
+            </a:pPr>
+            <a:r>
+              <a:rPr sz="1300" b="1" i="0">
+                <a:solidFill>
+                  <a:srgbClr val="006E96"/>
+                </a:solidFill>
+                <a:latin typeface="Arial"/>
+              </a:rPr>
+              <a:t>WAVE 4 — social protection</a:t>
+            </a:r>
+          </a:p>
+          <a:p>
+            <a:pPr algn="l">
+              <a:spcAft>
+                <a:spcPts val="300"/>
+              </a:spcAft>
+            </a:pPr>
+            <a:r>
+              <a:rPr sz="1150" b="0" i="0">
+                <a:solidFill>
+                  <a:srgbClr val="1A1A1A"/>
+                </a:solidFill>
+                <a:latin typeface="Arial"/>
+              </a:rPr>
+              <a:t>Easier still</a:t>
+            </a:r>
+          </a:p>
+        </p:txBody>
+      </p:sp>
+      <p:cxnSp>
+        <p:nvCxnSpPr>
+          <p:cNvPr id="11" name="Connector 10"/>
+          <p:cNvCxnSpPr/>
+          <p:nvPr/>
+        </p:nvCxnSpPr>
+        <p:spPr>
+          <a:xfrm>
+            <a:off x="9606312" y="4480559"/>
+            <a:ext cx="128016" cy="0"/>
+          </a:xfrm>
+          <a:prstGeom prst="line">
+            <a:avLst/>
+          </a:prstGeom>
+          <a:ln w="25400">
+            <a:solidFill>
+              <a:srgbClr val="006E96"/>
+            </a:solidFill>
+            <a:tailEnd type="triangle" w="med" len="med"/>
+          </a:ln>
+        </p:spPr>
+        <p:style>
+          <a:lnRef idx="2">
+            <a:schemeClr val="accent1"/>
+          </a:lnRef>
+          <a:fillRef idx="0">
+            <a:schemeClr val="accent1"/>
+          </a:fillRef>
+          <a:effectRef idx="1">
+            <a:schemeClr val="accent1"/>
+          </a:effectRef>
+          <a:fontRef idx="minor">
+            <a:schemeClr val="tx1"/>
+          </a:fontRef>
+        </p:style>
+      </p:cxnSp>
+      <p:sp>
+        <p:nvSpPr>
+          <p:cNvPr id="12" name="Rectangle 11"/>
+          <p:cNvSpPr/>
+          <p:nvPr/>
+        </p:nvSpPr>
+        <p:spPr>
+          <a:xfrm>
+            <a:off x="658368" y="5248656"/>
+            <a:ext cx="3738814" cy="182880"/>
+          </a:xfrm>
+          <a:prstGeom prst="rect">
+            <a:avLst/>
+          </a:prstGeom>
+          <a:solidFill>
+            <a:srgbClr val="006E96"/>
+          </a:solidFill>
+          <a:ln>
+            <a:noFill/>
+          </a:ln>
+          <a:effectLst/>
+        </p:spPr>
+        <p:style>
+          <a:lnRef idx="1">
+            <a:schemeClr val="accent1"/>
+          </a:lnRef>
+          <a:fillRef idx="3">
+            <a:schemeClr val="accent1"/>
+          </a:fillRef>
+          <a:effectRef idx="2">
+            <a:schemeClr val="accent1"/>
+          </a:effectRef>
+          <a:fontRef idx="minor">
+            <a:schemeClr val="lt1"/>
+          </a:fontRef>
+        </p:style>
+        <p:txBody>
+          <a:bodyPr rtlCol="0" anchor="ctr"/>
+          <a:lstStyle/>
+          <a:p>
+            <a:pPr algn="ctr"/>
+          </a:p>
+        </p:txBody>
+      </p:sp>
+      <p:sp>
+        <p:nvSpPr>
+          <p:cNvPr id="13" name="Rectangle 12"/>
+          <p:cNvSpPr/>
+          <p:nvPr/>
+        </p:nvSpPr>
+        <p:spPr>
+          <a:xfrm>
+            <a:off x="4397182" y="5175504"/>
+            <a:ext cx="2956953" cy="256032"/>
+          </a:xfrm>
+          <a:prstGeom prst="rect">
+            <a:avLst/>
+          </a:prstGeom>
+          <a:solidFill>
+            <a:srgbClr val="009CD6"/>
+          </a:solidFill>
+          <a:ln>
+            <a:noFill/>
+          </a:ln>
+          <a:effectLst/>
+        </p:spPr>
+        <p:style>
+          <a:lnRef idx="1">
+            <a:schemeClr val="accent1"/>
+          </a:lnRef>
+          <a:fillRef idx="3">
+            <a:schemeClr val="accent1"/>
+          </a:fillRef>
+          <a:effectRef idx="2">
+            <a:schemeClr val="accent1"/>
+          </a:effectRef>
+          <a:fontRef idx="minor">
+            <a:schemeClr val="lt1"/>
+          </a:fontRef>
+        </p:style>
+        <p:txBody>
+          <a:bodyPr rtlCol="0" anchor="ctr"/>
+          <a:lstStyle/>
+          <a:p>
+            <a:pPr algn="ctr"/>
+          </a:p>
+        </p:txBody>
+      </p:sp>
+      <p:sp>
+        <p:nvSpPr>
+          <p:cNvPr id="14" name="Rectangle 13"/>
+          <p:cNvSpPr/>
+          <p:nvPr/>
+        </p:nvSpPr>
+        <p:spPr>
+          <a:xfrm>
+            <a:off x="7354135" y="5102352"/>
+            <a:ext cx="2398481" cy="329184"/>
+          </a:xfrm>
+          <a:prstGeom prst="rect">
+            <a:avLst/>
+          </a:prstGeom>
+          <a:solidFill>
+            <a:srgbClr val="009CD6"/>
+          </a:solidFill>
+          <a:ln>
+            <a:noFill/>
+          </a:ln>
+          <a:effectLst/>
+        </p:spPr>
+        <p:style>
+          <a:lnRef idx="1">
+            <a:schemeClr val="accent1"/>
+          </a:lnRef>
+          <a:fillRef idx="3">
+            <a:schemeClr val="accent1"/>
+          </a:fillRef>
+          <a:effectRef idx="2">
+            <a:schemeClr val="accent1"/>
+          </a:effectRef>
+          <a:fontRef idx="minor">
+            <a:schemeClr val="lt1"/>
+          </a:fontRef>
+        </p:style>
+        <p:txBody>
+          <a:bodyPr rtlCol="0" anchor="ctr"/>
+          <a:lstStyle/>
+          <a:p>
+            <a:pPr algn="ctr"/>
+          </a:p>
+        </p:txBody>
+      </p:sp>
+      <p:sp>
+        <p:nvSpPr>
+          <p:cNvPr id="15" name="Rectangle 14"/>
+          <p:cNvSpPr/>
+          <p:nvPr/>
+        </p:nvSpPr>
+        <p:spPr>
+          <a:xfrm>
+            <a:off x="9752616" y="5029200"/>
+            <a:ext cx="1787111" cy="402336"/>
+          </a:xfrm>
+          <a:prstGeom prst="rect">
+            <a:avLst/>
+          </a:prstGeom>
+          <a:solidFill>
+            <a:srgbClr val="009CD6"/>
+          </a:solidFill>
+          <a:ln>
+            <a:noFill/>
+          </a:ln>
+          <a:effectLst/>
+        </p:spPr>
+        <p:style>
+          <a:lnRef idx="1">
+            <a:schemeClr val="accent1"/>
+          </a:lnRef>
+          <a:fillRef idx="3">
+            <a:schemeClr val="accent1"/>
+          </a:fillRef>
+          <a:effectRef idx="2">
+            <a:schemeClr val="accent1"/>
+          </a:effectRef>
+          <a:fontRef idx="minor">
+            <a:schemeClr val="lt1"/>
+          </a:fontRef>
+        </p:style>
+        <p:txBody>
+          <a:bodyPr rtlCol="0" anchor="ctr"/>
+          <a:lstStyle/>
+          <a:p>
+            <a:pPr algn="ctr"/>
+          </a:p>
+        </p:txBody>
+      </p:sp>
+      <p:sp>
+        <p:nvSpPr>
+          <p:cNvPr id="16" name="TextBox 15"/>
+          <p:cNvSpPr txBox="1"/>
+          <p:nvPr/>
+        </p:nvSpPr>
+        <p:spPr>
+          <a:xfrm>
+            <a:off x="658368" y="5486400"/>
+            <a:ext cx="10881360" cy="320040"/>
+          </a:xfrm>
+          <a:prstGeom prst="rect">
+            <a:avLst/>
+          </a:prstGeom>
+          <a:noFill/>
+        </p:spPr>
+        <p:txBody>
+          <a:bodyPr wrap="square">
+            <a:spAutoFit/>
+          </a:bodyPr>
+          <a:lstStyle/>
+          <a:p>
+            <a:r>
+              <a:rPr sz="1150" b="1" i="0">
+                <a:solidFill>
+                  <a:srgbClr val="006E96"/>
+                </a:solidFill>
+                <a:latin typeface="Arial"/>
+              </a:rPr>
+              <a:t>Shared platforms — more complete with every wave</a:t>
+            </a:r>
+          </a:p>
+        </p:txBody>
+      </p:sp>
+      <p:sp>
+        <p:nvSpPr>
+          <p:cNvPr id="17" name="TextBox 16"/>
+          <p:cNvSpPr txBox="1"/>
+          <p:nvPr/>
+        </p:nvSpPr>
+        <p:spPr>
+          <a:xfrm>
+            <a:off x="658368" y="5806440"/>
+            <a:ext cx="10881360" cy="548640"/>
+          </a:xfrm>
+          <a:prstGeom prst="rect">
+            <a:avLst/>
+          </a:prstGeom>
+          <a:noFill/>
+        </p:spPr>
+        <p:txBody>
+          <a:bodyPr wrap="square">
+            <a:spAutoFit/>
+          </a:bodyPr>
+          <a:lstStyle/>
+          <a:p>
+            <a:r>
+              <a:rPr sz="1550" b="1" i="0">
+                <a:solidFill>
+                  <a:srgbClr val="006E96"/>
+                </a:solidFill>
+                <a:latin typeface="Arial"/>
+              </a:rPr>
+              <a:t>Launched and left, a rollout drifts back into fragmentation. Governed, it compounds.</a:t>
+            </a:r>
+          </a:p>
+        </p:txBody>
+      </p:sp>
+      <p:sp>
+        <p:nvSpPr>
+          <p:cNvPr id="18" name="TextBox 17"/>
+          <p:cNvSpPr txBox="1"/>
+          <p:nvPr/>
+        </p:nvSpPr>
+        <p:spPr>
+          <a:xfrm>
+            <a:off x="457200" y="6473952"/>
+            <a:ext cx="7772400" cy="292608"/>
+          </a:xfrm>
+          <a:prstGeom prst="rect">
+            <a:avLst/>
+          </a:prstGeom>
+          <a:noFill/>
+        </p:spPr>
+        <p:txBody>
+          <a:bodyPr wrap="square">
+            <a:spAutoFit/>
+          </a:bodyPr>
+          <a:lstStyle/>
+          <a:p>
+            <a:r>
+              <a:rPr sz="900" b="0" i="0">
+                <a:solidFill>
+                  <a:srgbClr val="595959"/>
+                </a:solidFill>
+                <a:latin typeface="Arial"/>
+              </a:rPr>
+              <a:t>5.3 · Roll it out across sectors — and why the second is cheaper</a:t>
+            </a:r>
+          </a:p>
+        </p:txBody>
+      </p:sp>
+    </p:spTree>
+  </p:cSld>
+  <p:clrMapOvr>
+    <a:masterClrMapping/>
+  </p:clrMapOvr>
+</p:sld>
+</file>
+
+<file path=ppt/slides/slide23.xml><?xml version="1.0" encoding="utf-8"?>
+<p:sld xmlns:a="http://schemas.openxmlformats.org/drawingml/2006/main" xmlns:p="http://schemas.openxmlformats.org/presentationml/2006/main" xmlns:r="http://schemas.openxmlformats.org/officeDocument/2006/relationships">
+  <p:cSld>
+    <p:spTree>
+      <p:nvGrpSpPr>
+        <p:cNvPr id="1" name=""/>
+        <p:cNvGrpSpPr/>
+        <p:nvPr/>
+      </p:nvGrpSpPr>
+      <p:grpSpPr/>
+      <p:sp>
+        <p:nvSpPr>
+          <p:cNvPr id="2" name="Rectangle 1"/>
+          <p:cNvSpPr/>
+          <p:nvPr/>
+        </p:nvSpPr>
+        <p:spPr>
+          <a:xfrm>
+            <a:off x="457200" y="384048"/>
+            <a:ext cx="45720" cy="256032"/>
+          </a:xfrm>
+          <a:prstGeom prst="rect">
+            <a:avLst/>
+          </a:prstGeom>
+          <a:solidFill>
+            <a:srgbClr val="009CD6"/>
+          </a:solidFill>
+          <a:ln>
+            <a:noFill/>
+          </a:ln>
+          <a:effectLst/>
+        </p:spPr>
+        <p:style>
+          <a:lnRef idx="1">
+            <a:schemeClr val="accent1"/>
+          </a:lnRef>
+          <a:fillRef idx="3">
+            <a:schemeClr val="accent1"/>
+          </a:fillRef>
+          <a:effectRef idx="2">
+            <a:schemeClr val="accent1"/>
+          </a:effectRef>
+          <a:fontRef idx="minor">
+            <a:schemeClr val="lt1"/>
+          </a:fontRef>
+        </p:style>
+        <p:txBody>
+          <a:bodyPr rtlCol="0" anchor="ctr"/>
+          <a:lstStyle/>
+          <a:p>
+            <a:pPr algn="ctr"/>
+          </a:p>
+        </p:txBody>
+      </p:sp>
+      <p:sp>
+        <p:nvSpPr>
+          <p:cNvPr id="3" name="TextBox 2"/>
+          <p:cNvSpPr txBox="1"/>
+          <p:nvPr/>
+        </p:nvSpPr>
+        <p:spPr>
+          <a:xfrm>
+            <a:off x="621792" y="274320"/>
+            <a:ext cx="11247120" cy="914400"/>
+          </a:xfrm>
+          <a:prstGeom prst="rect">
+            <a:avLst/>
+          </a:prstGeom>
+          <a:noFill/>
+        </p:spPr>
+        <p:txBody>
+          <a:bodyPr wrap="square">
+            <a:spAutoFit/>
+          </a:bodyPr>
+          <a:lstStyle/>
+          <a:p>
+            <a:r>
+              <a:rPr sz="2800" b="1" i="0">
+                <a:solidFill>
+                  <a:srgbClr val="1A1A1A"/>
+                </a:solidFill>
+                <a:latin typeface="Arial"/>
+              </a:rPr>
+              <a:t>One page, every quarter — the national scorecard</a:t>
+            </a:r>
+          </a:p>
+        </p:txBody>
+      </p:sp>
+      <p:sp>
+        <p:nvSpPr>
+          <p:cNvPr id="4" name="TextBox 3"/>
+          <p:cNvSpPr txBox="1"/>
+          <p:nvPr/>
+        </p:nvSpPr>
+        <p:spPr>
+          <a:xfrm>
+            <a:off x="658368" y="1463040"/>
+            <a:ext cx="10984687" cy="1386839"/>
+          </a:xfrm>
+          <a:prstGeom prst="rect">
+            <a:avLst/>
+          </a:prstGeom>
+          <a:noFill/>
+        </p:spPr>
+        <p:txBody>
+          <a:bodyPr wrap="square">
+            <a:spAutoFit/>
+          </a:bodyPr>
+          <a:lstStyle/>
+          <a:p>
+            <a:pPr>
+              <a:spcAft>
+                <a:spcPts val="300"/>
+              </a:spcAft>
+            </a:pPr>
+            <a:r>
+              <a:rPr sz="1900" b="1" i="0">
+                <a:solidFill>
+                  <a:srgbClr val="1A1A1A"/>
+                </a:solidFill>
+                <a:latin typeface="Arial"/>
+              </a:rPr>
+              <a:t>Sectors live</a:t>
+            </a:r>
+          </a:p>
+          <a:p>
+            <a:pPr>
+              <a:spcAft>
+                <a:spcPts val="300"/>
+              </a:spcAft>
+            </a:pPr>
+            <a:r>
+              <a:rPr sz="1550" b="0" i="0">
+                <a:solidFill>
+                  <a:srgbClr val="595959"/>
+                </a:solidFill>
+                <a:latin typeface="Arial"/>
+              </a:rPr>
+              <a:t>How many have run the method end to end.</a:t>
+            </a:r>
+          </a:p>
+        </p:txBody>
+      </p:sp>
+      <p:sp>
+        <p:nvSpPr>
+          <p:cNvPr id="5" name="Rectangle 4"/>
+          <p:cNvSpPr/>
+          <p:nvPr/>
+        </p:nvSpPr>
+        <p:spPr>
+          <a:xfrm>
+            <a:off x="621792" y="2854452"/>
+            <a:ext cx="10881360" cy="12700"/>
+          </a:xfrm>
+          <a:prstGeom prst="rect">
+            <a:avLst/>
+          </a:prstGeom>
+          <a:solidFill>
+            <a:srgbClr val="DDECF4"/>
+          </a:solidFill>
+          <a:ln>
+            <a:noFill/>
+          </a:ln>
+          <a:effectLst/>
+        </p:spPr>
+        <p:style>
+          <a:lnRef idx="1">
+            <a:schemeClr val="accent1"/>
+          </a:lnRef>
+          <a:fillRef idx="3">
+            <a:schemeClr val="accent1"/>
+          </a:fillRef>
+          <a:effectRef idx="2">
+            <a:schemeClr val="accent1"/>
+          </a:effectRef>
+          <a:fontRef idx="minor">
+            <a:schemeClr val="lt1"/>
+          </a:fontRef>
+        </p:style>
+        <p:txBody>
+          <a:bodyPr rtlCol="0" anchor="ctr"/>
+          <a:lstStyle/>
+          <a:p>
+            <a:pPr algn="ctr"/>
+          </a:p>
+        </p:txBody>
+      </p:sp>
+      <p:sp>
+        <p:nvSpPr>
+          <p:cNvPr id="6" name="TextBox 5"/>
+          <p:cNvSpPr txBox="1"/>
+          <p:nvPr/>
+        </p:nvSpPr>
+        <p:spPr>
+          <a:xfrm>
+            <a:off x="658368" y="2895600"/>
+            <a:ext cx="10984687" cy="1386839"/>
+          </a:xfrm>
+          <a:prstGeom prst="rect">
+            <a:avLst/>
+          </a:prstGeom>
+          <a:noFill/>
+        </p:spPr>
+        <p:txBody>
+          <a:bodyPr wrap="square">
+            <a:spAutoFit/>
+          </a:bodyPr>
+          <a:lstStyle/>
+          <a:p>
+            <a:pPr>
+              <a:spcAft>
+                <a:spcPts val="300"/>
+              </a:spcAft>
+            </a:pPr>
+            <a:r>
+              <a:rPr sz="1900" b="1" i="0">
+                <a:solidFill>
+                  <a:srgbClr val="1A1A1A"/>
+                </a:solidFill>
+                <a:latin typeface="Arial"/>
+              </a:rPr>
+              <a:t>The re-use rate across them</a:t>
+            </a:r>
+          </a:p>
+          <a:p>
+            <a:pPr>
+              <a:spcAft>
+                <a:spcPts val="300"/>
+              </a:spcAft>
+            </a:pPr>
+            <a:r>
+              <a:rPr sz="1550" b="0" i="0">
+                <a:solidFill>
+                  <a:srgbClr val="595959"/>
+                </a:solidFill>
+                <a:latin typeface="Arial"/>
+              </a:rPr>
+              <a:t>How much of the new work consumes a shared block instead of rebuilding it.</a:t>
+            </a:r>
+          </a:p>
+        </p:txBody>
+      </p:sp>
+      <p:sp>
+        <p:nvSpPr>
+          <p:cNvPr id="7" name="Rectangle 6"/>
+          <p:cNvSpPr/>
+          <p:nvPr/>
+        </p:nvSpPr>
+        <p:spPr>
+          <a:xfrm>
+            <a:off x="621792" y="4287011"/>
+            <a:ext cx="10881360" cy="12700"/>
+          </a:xfrm>
+          <a:prstGeom prst="rect">
+            <a:avLst/>
+          </a:prstGeom>
+          <a:solidFill>
+            <a:srgbClr val="DDECF4"/>
+          </a:solidFill>
+          <a:ln>
+            <a:noFill/>
+          </a:ln>
+          <a:effectLst/>
+        </p:spPr>
+        <p:style>
+          <a:lnRef idx="1">
+            <a:schemeClr val="accent1"/>
+          </a:lnRef>
+          <a:fillRef idx="3">
+            <a:schemeClr val="accent1"/>
+          </a:fillRef>
+          <a:effectRef idx="2">
+            <a:schemeClr val="accent1"/>
+          </a:effectRef>
+          <a:fontRef idx="minor">
+            <a:schemeClr val="lt1"/>
+          </a:fontRef>
+        </p:style>
+        <p:txBody>
+          <a:bodyPr rtlCol="0" anchor="ctr"/>
+          <a:lstStyle/>
+          <a:p>
+            <a:pPr algn="ctr"/>
+          </a:p>
+        </p:txBody>
+      </p:sp>
+      <p:sp>
+        <p:nvSpPr>
+          <p:cNvPr id="8" name="TextBox 7"/>
+          <p:cNvSpPr txBox="1"/>
+          <p:nvPr/>
+        </p:nvSpPr>
+        <p:spPr>
+          <a:xfrm>
+            <a:off x="658368" y="4328159"/>
+            <a:ext cx="10984687" cy="1386839"/>
+          </a:xfrm>
+          <a:prstGeom prst="rect">
+            <a:avLst/>
+          </a:prstGeom>
+          <a:noFill/>
+        </p:spPr>
+        <p:txBody>
+          <a:bodyPr wrap="square">
+            <a:spAutoFit/>
+          </a:bodyPr>
+          <a:lstStyle/>
+          <a:p>
+            <a:pPr>
+              <a:spcAft>
+                <a:spcPts val="300"/>
+              </a:spcAft>
+            </a:pPr>
+            <a:r>
+              <a:rPr sz="1900" b="1" i="0">
+                <a:solidFill>
+                  <a:srgbClr val="1A1A1A"/>
+                </a:solidFill>
+                <a:latin typeface="Arial"/>
+              </a:rPr>
+              <a:t>Shared platforms in place</a:t>
+            </a:r>
+          </a:p>
+          <a:p>
+            <a:pPr>
+              <a:spcAft>
+                <a:spcPts val="300"/>
+              </a:spcAft>
+            </a:pPr>
+            <a:r>
+              <a:rPr sz="1550" b="0" i="0">
+                <a:solidFill>
+                  <a:srgbClr val="595959"/>
+                </a:solidFill>
+                <a:latin typeface="Arial"/>
+              </a:rPr>
+              <a:t>Which of identity and data exchange are authoritative and available.</a:t>
+            </a:r>
+          </a:p>
+        </p:txBody>
+      </p:sp>
+      <p:sp>
+        <p:nvSpPr>
+          <p:cNvPr id="9" name="TextBox 8"/>
+          <p:cNvSpPr txBox="1"/>
+          <p:nvPr/>
+        </p:nvSpPr>
+        <p:spPr>
+          <a:xfrm>
+            <a:off x="658368" y="5870448"/>
+            <a:ext cx="10881360" cy="548640"/>
+          </a:xfrm>
+          <a:prstGeom prst="rect">
+            <a:avLst/>
+          </a:prstGeom>
+          <a:noFill/>
+        </p:spPr>
+        <p:txBody>
+          <a:bodyPr wrap="square">
+            <a:spAutoFit/>
+          </a:bodyPr>
+          <a:lstStyle/>
+          <a:p>
+            <a:r>
+              <a:rPr sz="1550" b="1" i="0">
+                <a:solidFill>
+                  <a:srgbClr val="006E96"/>
+                </a:solidFill>
+                <a:latin typeface="Arial"/>
+              </a:rPr>
+              <a:t>It sustains funding across a change of government, and catches a drifting sector early.</a:t>
+            </a:r>
+          </a:p>
+        </p:txBody>
+      </p:sp>
+      <p:sp>
+        <p:nvSpPr>
+          <p:cNvPr id="10" name="TextBox 9"/>
+          <p:cNvSpPr txBox="1"/>
+          <p:nvPr/>
+        </p:nvSpPr>
+        <p:spPr>
+          <a:xfrm>
+            <a:off x="457200" y="6473952"/>
+            <a:ext cx="7772400" cy="292608"/>
+          </a:xfrm>
+          <a:prstGeom prst="rect">
+            <a:avLst/>
+          </a:prstGeom>
+          <a:noFill/>
+        </p:spPr>
+        <p:txBody>
+          <a:bodyPr wrap="square">
+            <a:spAutoFit/>
+          </a:bodyPr>
+          <a:lstStyle/>
+          <a:p>
+            <a:r>
+              <a:rPr sz="900" b="0" i="0">
+                <a:solidFill>
+                  <a:srgbClr val="595959"/>
+                </a:solidFill>
+                <a:latin typeface="Arial"/>
+              </a:rPr>
+              <a:t>5.3 · Roll it out across sectors — and why the second is cheaper</a:t>
+            </a:r>
+          </a:p>
+        </p:txBody>
+      </p:sp>
+    </p:spTree>
+  </p:cSld>
+  <p:clrMapOvr>
+    <a:masterClrMapping/>
+  </p:clrMapOvr>
+</p:sld>
+</file>
+
+<file path=ppt/slides/slide24.xml><?xml version="1.0" encoding="utf-8"?>
+<p:sld xmlns:a="http://schemas.openxmlformats.org/drawingml/2006/main" xmlns:p="http://schemas.openxmlformats.org/presentationml/2006/main" xmlns:r="http://schemas.openxmlformats.org/officeDocument/2006/relationships">
+  <p:cSld>
+    <p:spTree>
+      <p:nvGrpSpPr>
+        <p:cNvPr id="1" name=""/>
+        <p:cNvGrpSpPr/>
+        <p:nvPr/>
+      </p:nvGrpSpPr>
+      <p:grpSpPr/>
+      <p:sp>
+        <p:nvSpPr>
           <p:cNvPr id="2" name="TextBox 1"/>
           <p:cNvSpPr txBox="1"/>
           <p:nvPr/>
@@ -14772,7 +14250,7 @@
 </p:sld>
 </file>
 
-<file path=ppt/slides/slide22.xml><?xml version="1.0" encoding="utf-8"?>
+<file path=ppt/slides/slide25.xml><?xml version="1.0" encoding="utf-8"?>
 <p:sld xmlns:a="http://schemas.openxmlformats.org/drawingml/2006/main" xmlns:p="http://schemas.openxmlformats.org/presentationml/2006/main" xmlns:r="http://schemas.openxmlformats.org/officeDocument/2006/relationships">
   <p:cSld>
     <p:spTree>

--- a/10-Knowledge-Products/KP1-GEA/videos/module_5/en/decks/KP1_M5_5.3_Deck_v0.2.pptx
+++ b/10-Knowledge-Products/KP1-GEA/videos/module_5/en/decks/KP1_M5_5.3_Deck_v0.2.pptx
@@ -11783,7 +11783,7 @@
                 </a:solidFill>
                 <a:latin typeface="Arial"/>
               </a:rPr>
-              <a:t>~5 minutes · standalone video · voice-over on text slides</a:t>
+              <a:t>standalone video · voice-over on text slides</a:t>
             </a:r>
           </a:p>
         </p:txBody>

--- a/10-Knowledge-Products/KP1-GEA/videos/module_5/en/decks/KP1_M5_5.3_Deck_v0.2.pptx
+++ b/10-Knowledge-Products/KP1-GEA/videos/module_5/en/decks/KP1_M5_5.3_Deck_v0.2.pptx
@@ -11647,7 +11647,7 @@
                 </a:solidFill>
                 <a:latin typeface="Arial"/>
               </a:rPr>
-              <a:t>KP1 · MODULE 5 · VIDEO 5.3</a:t>
+              <a:t>MODULE 5 · VIDEO 5.3</a:t>
             </a:r>
           </a:p>
         </p:txBody>
